--- a/make_presentation/templates/templates/flow/no_logo_12.pptx
+++ b/make_presentation/templates/templates/flow/no_logo_12.pptx
@@ -75,12 +75,12 @@
               <a:buNone/>
             </a:pPr>
             <a:r>
-              <a:rPr b="0" lang="ru-RU" sz="4400" spc="-1" strike="noStrike">
-                <a:latin typeface="Arial"/>
-              </a:rPr>
-              <a:t>Для перемещения страницы щёлкните мышью</a:t>
-            </a:r>
-            <a:endParaRPr b="0" lang="ru-RU" sz="4400" spc="-1" strike="noStrike">
+              <a:rPr b="0" lang="en-US" sz="4400" spc="-1" strike="noStrike">
+                <a:latin typeface="Arial"/>
+              </a:rPr>
+              <a:t>Click to move the slide</a:t>
+            </a:r>
+            <a:endParaRPr b="0" lang="en-US" sz="4400" spc="-1" strike="noStrike">
               <a:latin typeface="Arial"/>
             </a:endParaRPr>
           </a:p>
@@ -115,12 +115,12 @@
           </a:bodyPr>
           <a:p>
             <a:r>
-              <a:rPr b="0" lang="ru-RU" sz="2000" spc="-1" strike="noStrike">
-                <a:latin typeface="Arial"/>
-              </a:rPr>
-              <a:t>Для правки формата примечаний щёлкните мышью</a:t>
-            </a:r>
-            <a:endParaRPr b="0" lang="ru-RU" sz="2000" spc="-1" strike="noStrike">
+              <a:rPr b="0" lang="en-US" sz="2000" spc="-1" strike="noStrike">
+                <a:latin typeface="Arial"/>
+              </a:rPr>
+              <a:t>Click to edit the notes format</a:t>
+            </a:r>
+            <a:endParaRPr b="0" lang="en-US" sz="2000" spc="-1" strike="noStrike">
               <a:latin typeface="Arial"/>
             </a:endParaRPr>
           </a:p>
@@ -155,12 +155,12 @@
           </a:bodyPr>
           <a:p>
             <a:r>
-              <a:rPr b="0" lang="ru-RU" sz="1400" spc="-1" strike="noStrike">
+              <a:rPr b="0" lang="en-US" sz="1400" spc="-1" strike="noStrike">
                 <a:latin typeface="Times New Roman"/>
               </a:rPr>
-              <a:t>&lt;верхний колонтитул&gt;</a:t>
-            </a:r>
-            <a:endParaRPr b="0" lang="ru-RU" sz="1400" spc="-1" strike="noStrike">
+              <a:t>&lt;header&gt;</a:t>
+            </a:r>
+            <a:endParaRPr b="0" lang="en-US" sz="1400" spc="-1" strike="noStrike">
               <a:latin typeface="Times New Roman"/>
             </a:endParaRPr>
           </a:p>
@@ -196,7 +196,7 @@
           <a:lstStyle>
             <a:lvl1pPr algn="r">
               <a:buNone/>
-              <a:defRPr b="0" lang="ru-RU" sz="1400" spc="-1" strike="noStrike">
+              <a:defRPr b="0" lang="en-US" sz="1400" spc="-1" strike="noStrike">
                 <a:latin typeface="Times New Roman"/>
               </a:defRPr>
             </a:lvl1pPr>
@@ -206,12 +206,12 @@
               <a:buNone/>
             </a:pPr>
             <a:r>
-              <a:rPr b="0" lang="ru-RU" sz="1400" spc="-1" strike="noStrike">
+              <a:rPr b="0" lang="en-US" sz="1400" spc="-1" strike="noStrike">
                 <a:latin typeface="Times New Roman"/>
               </a:rPr>
-              <a:t>&lt;дата/время&gt;</a:t>
-            </a:r>
-            <a:endParaRPr b="0" lang="ru-RU" sz="1400" spc="-1" strike="noStrike">
+              <a:t>&lt;date/time&gt;</a:t>
+            </a:r>
+            <a:endParaRPr b="0" lang="en-US" sz="1400" spc="-1" strike="noStrike">
               <a:latin typeface="Times New Roman"/>
             </a:endParaRPr>
           </a:p>
@@ -246,19 +246,19 @@
           </a:bodyPr>
           <a:lstStyle>
             <a:lvl1pPr>
-              <a:defRPr b="0" lang="ru-RU" sz="1400" spc="-1" strike="noStrike">
+              <a:defRPr b="0" lang="en-US" sz="1400" spc="-1" strike="noStrike">
                 <a:latin typeface="Times New Roman"/>
               </a:defRPr>
             </a:lvl1pPr>
           </a:lstStyle>
           <a:p>
             <a:r>
-              <a:rPr b="0" lang="ru-RU" sz="1400" spc="-1" strike="noStrike">
+              <a:rPr b="0" lang="en-US" sz="1400" spc="-1" strike="noStrike">
                 <a:latin typeface="Times New Roman"/>
               </a:rPr>
-              <a:t>&lt;нижний колонтитул&gt;</a:t>
-            </a:r>
-            <a:endParaRPr b="0" lang="ru-RU" sz="1400" spc="-1" strike="noStrike">
+              <a:t>&lt;footer&gt;</a:t>
+            </a:r>
+            <a:endParaRPr b="0" lang="en-US" sz="1400" spc="-1" strike="noStrike">
               <a:latin typeface="Times New Roman"/>
             </a:endParaRPr>
           </a:p>
@@ -294,7 +294,7 @@
           <a:lstStyle>
             <a:lvl1pPr algn="r">
               <a:buNone/>
-              <a:defRPr b="0" lang="ru-RU" sz="1400" spc="-1" strike="noStrike">
+              <a:defRPr b="0" lang="en-US" sz="1400" spc="-1" strike="noStrike">
                 <a:latin typeface="Times New Roman"/>
               </a:defRPr>
             </a:lvl1pPr>
@@ -303,13 +303,13 @@
             <a:pPr algn="r">
               <a:buNone/>
             </a:pPr>
-            <a:fld id="{AD68C5E5-FBD3-4396-9C94-8962C2644619}" type="slidenum">
-              <a:rPr b="0" lang="ru-RU" sz="1400" spc="-1" strike="noStrike">
+            <a:fld id="{A190F032-C22D-439B-AECF-755237046EE2}" type="slidenum">
+              <a:rPr b="0" lang="en-US" sz="1400" spc="-1" strike="noStrike">
                 <a:latin typeface="Times New Roman"/>
               </a:rPr>
-              <a:t>&lt;номер&gt;</a:t>
+              <a:t>&lt;number&gt;</a:t>
             </a:fld>
-            <a:endParaRPr b="0" lang="ru-RU" sz="1400" spc="-1" strike="noStrike">
+            <a:endParaRPr b="0" lang="en-US" sz="1400" spc="-1" strike="noStrike">
               <a:latin typeface="Times New Roman"/>
             </a:endParaRPr>
           </a:p>
@@ -340,7 +340,7 @@
       </p:grpSpPr>
       <p:sp>
         <p:nvSpPr>
-          <p:cNvPr id="178" name="PlaceHolder 1"/>
+          <p:cNvPr id="177" name="PlaceHolder 1"/>
           <p:cNvSpPr>
             <a:spLocks noGrp="1"/>
           </p:cNvSpPr>
@@ -351,19 +351,19 @@
         <p:spPr>
           <a:xfrm>
             <a:off x="685800" y="1143000"/>
-            <a:ext cx="5485680" cy="3085560"/>
-          </a:xfrm>
-          <a:prstGeom prst="rect">
-            <a:avLst/>
-          </a:prstGeom>
-          <a:ln w="0">
-            <a:noFill/>
-          </a:ln>
-        </p:spPr>
-      </p:sp>
-      <p:sp>
-        <p:nvSpPr>
-          <p:cNvPr id="179" name="PlaceHolder 2"/>
+            <a:ext cx="5485320" cy="3085200"/>
+          </a:xfrm>
+          <a:prstGeom prst="rect">
+            <a:avLst/>
+          </a:prstGeom>
+          <a:ln w="0">
+            <a:noFill/>
+          </a:ln>
+        </p:spPr>
+      </p:sp>
+      <p:sp>
+        <p:nvSpPr>
+          <p:cNvPr id="178" name="PlaceHolder 2"/>
           <p:cNvSpPr>
             <a:spLocks noGrp="1"/>
           </p:cNvSpPr>
@@ -374,7 +374,7 @@
         <p:spPr>
           <a:xfrm>
             <a:off x="685800" y="4400640"/>
-            <a:ext cx="5485680" cy="3599640"/>
+            <a:ext cx="5485320" cy="3599280"/>
           </a:xfrm>
           <a:prstGeom prst="rect">
             <a:avLst/>
@@ -389,15 +389,15 @@
             <a:noAutofit/>
           </a:bodyPr>
           <a:p>
-            <a:endParaRPr b="0" lang="ru-RU" sz="2000" spc="-1" strike="noStrike">
-              <a:latin typeface="Arial"/>
-            </a:endParaRPr>
-          </a:p>
-        </p:txBody>
-      </p:sp>
-      <p:sp>
-        <p:nvSpPr>
-          <p:cNvPr id="180" name="PlaceHolder 3"/>
+            <a:endParaRPr b="0" lang="en-US" sz="2000" spc="-1" strike="noStrike">
+              <a:latin typeface="Arial"/>
+            </a:endParaRPr>
+          </a:p>
+        </p:txBody>
+      </p:sp>
+      <p:sp>
+        <p:nvSpPr>
+          <p:cNvPr id="179" name="PlaceHolder 3"/>
           <p:cNvSpPr>
             <a:spLocks noGrp="1"/>
           </p:cNvSpPr>
@@ -408,7 +408,7 @@
         <p:spPr>
           <a:xfrm>
             <a:off x="3884760" y="8685360"/>
-            <a:ext cx="2971080" cy="457920"/>
+            <a:ext cx="2970720" cy="457560"/>
           </a:xfrm>
           <a:prstGeom prst="rect">
             <a:avLst/>
@@ -440,13 +440,13 @@
               </a:lnSpc>
               <a:buNone/>
             </a:pPr>
-            <a:fld id="{269BAD43-02C3-4665-A067-A627B9A2396D}" type="slidenum">
+            <a:fld id="{CDFA59D8-222A-4704-897E-422585D06BEE}" type="slidenum">
               <a:rPr b="0" lang="ru-RU" sz="1200" spc="-1" strike="noStrike">
                 <a:latin typeface="Times New Roman"/>
               </a:rPr>
-              <a:t>&lt;номер&gt;</a:t>
+              <a:t>&lt;number&gt;</a:t>
             </a:fld>
-            <a:endParaRPr b="0" lang="ru-RU" sz="1200" spc="-1" strike="noStrike">
+            <a:endParaRPr b="0" lang="en-US" sz="1200" spc="-1" strike="noStrike">
               <a:latin typeface="Times New Roman"/>
             </a:endParaRPr>
           </a:p>
@@ -476,7 +476,7 @@
       </p:grpSpPr>
       <p:sp>
         <p:nvSpPr>
-          <p:cNvPr id="181" name="PlaceHolder 1"/>
+          <p:cNvPr id="180" name="PlaceHolder 1"/>
           <p:cNvSpPr>
             <a:spLocks noGrp="1"/>
           </p:cNvSpPr>
@@ -487,19 +487,19 @@
         <p:spPr>
           <a:xfrm>
             <a:off x="685800" y="1143000"/>
-            <a:ext cx="5485680" cy="3085560"/>
-          </a:xfrm>
-          <a:prstGeom prst="rect">
-            <a:avLst/>
-          </a:prstGeom>
-          <a:ln w="0">
-            <a:noFill/>
-          </a:ln>
-        </p:spPr>
-      </p:sp>
-      <p:sp>
-        <p:nvSpPr>
-          <p:cNvPr id="182" name="PlaceHolder 2"/>
+            <a:ext cx="5485320" cy="3085200"/>
+          </a:xfrm>
+          <a:prstGeom prst="rect">
+            <a:avLst/>
+          </a:prstGeom>
+          <a:ln w="0">
+            <a:noFill/>
+          </a:ln>
+        </p:spPr>
+      </p:sp>
+      <p:sp>
+        <p:nvSpPr>
+          <p:cNvPr id="181" name="PlaceHolder 2"/>
           <p:cNvSpPr>
             <a:spLocks noGrp="1"/>
           </p:cNvSpPr>
@@ -510,7 +510,7 @@
         <p:spPr>
           <a:xfrm>
             <a:off x="685800" y="4400640"/>
-            <a:ext cx="5485680" cy="3599640"/>
+            <a:ext cx="5485320" cy="3599280"/>
           </a:xfrm>
           <a:prstGeom prst="rect">
             <a:avLst/>
@@ -525,15 +525,15 @@
             <a:noAutofit/>
           </a:bodyPr>
           <a:p>
-            <a:endParaRPr b="0" lang="ru-RU" sz="2000" spc="-1" strike="noStrike">
-              <a:latin typeface="Arial"/>
-            </a:endParaRPr>
-          </a:p>
-        </p:txBody>
-      </p:sp>
-      <p:sp>
-        <p:nvSpPr>
-          <p:cNvPr id="183" name="PlaceHolder 3"/>
+            <a:endParaRPr b="0" lang="en-US" sz="2000" spc="-1" strike="noStrike">
+              <a:latin typeface="Arial"/>
+            </a:endParaRPr>
+          </a:p>
+        </p:txBody>
+      </p:sp>
+      <p:sp>
+        <p:nvSpPr>
+          <p:cNvPr id="182" name="PlaceHolder 3"/>
           <p:cNvSpPr>
             <a:spLocks noGrp="1"/>
           </p:cNvSpPr>
@@ -544,7 +544,7 @@
         <p:spPr>
           <a:xfrm>
             <a:off x="3884760" y="8685360"/>
-            <a:ext cx="2971080" cy="457920"/>
+            <a:ext cx="2970720" cy="457560"/>
           </a:xfrm>
           <a:prstGeom prst="rect">
             <a:avLst/>
@@ -576,13 +576,13 @@
               </a:lnSpc>
               <a:buNone/>
             </a:pPr>
-            <a:fld id="{E3C756BD-EC9F-4652-A9F4-EADE9F8F8107}" type="slidenum">
+            <a:fld id="{2ED08E33-8FC1-4BE4-B5BD-0DDE8AF17434}" type="slidenum">
               <a:rPr b="0" lang="ru-RU" sz="1200" spc="-1" strike="noStrike">
                 <a:latin typeface="Times New Roman"/>
               </a:rPr>
-              <a:t>&lt;номер&gt;</a:t>
+              <a:t>&lt;number&gt;</a:t>
             </a:fld>
-            <a:endParaRPr b="0" lang="ru-RU" sz="1200" spc="-1" strike="noStrike">
+            <a:endParaRPr b="0" lang="en-US" sz="1200" spc="-1" strike="noStrike">
               <a:latin typeface="Times New Roman"/>
             </a:endParaRPr>
           </a:p>
@@ -612,7 +612,7 @@
       </p:grpSpPr>
       <p:sp>
         <p:nvSpPr>
-          <p:cNvPr id="169" name="PlaceHolder 1"/>
+          <p:cNvPr id="168" name="PlaceHolder 1"/>
           <p:cNvSpPr>
             <a:spLocks noGrp="1"/>
           </p:cNvSpPr>
@@ -623,19 +623,19 @@
         <p:spPr>
           <a:xfrm>
             <a:off x="685800" y="1143000"/>
-            <a:ext cx="5485680" cy="3085560"/>
-          </a:xfrm>
-          <a:prstGeom prst="rect">
-            <a:avLst/>
-          </a:prstGeom>
-          <a:ln w="0">
-            <a:noFill/>
-          </a:ln>
-        </p:spPr>
-      </p:sp>
-      <p:sp>
-        <p:nvSpPr>
-          <p:cNvPr id="170" name="PlaceHolder 2"/>
+            <a:ext cx="5485320" cy="3085200"/>
+          </a:xfrm>
+          <a:prstGeom prst="rect">
+            <a:avLst/>
+          </a:prstGeom>
+          <a:ln w="0">
+            <a:noFill/>
+          </a:ln>
+        </p:spPr>
+      </p:sp>
+      <p:sp>
+        <p:nvSpPr>
+          <p:cNvPr id="169" name="PlaceHolder 2"/>
           <p:cNvSpPr>
             <a:spLocks noGrp="1"/>
           </p:cNvSpPr>
@@ -646,7 +646,7 @@
         <p:spPr>
           <a:xfrm>
             <a:off x="685800" y="4400640"/>
-            <a:ext cx="5485680" cy="3599640"/>
+            <a:ext cx="5485320" cy="3599280"/>
           </a:xfrm>
           <a:prstGeom prst="rect">
             <a:avLst/>
@@ -661,15 +661,15 @@
             <a:noAutofit/>
           </a:bodyPr>
           <a:p>
-            <a:endParaRPr b="0" lang="ru-RU" sz="2000" spc="-1" strike="noStrike">
-              <a:latin typeface="Arial"/>
-            </a:endParaRPr>
-          </a:p>
-        </p:txBody>
-      </p:sp>
-      <p:sp>
-        <p:nvSpPr>
-          <p:cNvPr id="171" name="PlaceHolder 3"/>
+            <a:endParaRPr b="0" lang="en-US" sz="2000" spc="-1" strike="noStrike">
+              <a:latin typeface="Arial"/>
+            </a:endParaRPr>
+          </a:p>
+        </p:txBody>
+      </p:sp>
+      <p:sp>
+        <p:nvSpPr>
+          <p:cNvPr id="170" name="PlaceHolder 3"/>
           <p:cNvSpPr>
             <a:spLocks noGrp="1"/>
           </p:cNvSpPr>
@@ -680,7 +680,7 @@
         <p:spPr>
           <a:xfrm>
             <a:off x="3884760" y="8685360"/>
-            <a:ext cx="2971080" cy="457920"/>
+            <a:ext cx="2970720" cy="457560"/>
           </a:xfrm>
           <a:prstGeom prst="rect">
             <a:avLst/>
@@ -712,13 +712,13 @@
               </a:lnSpc>
               <a:buNone/>
             </a:pPr>
-            <a:fld id="{2AF0F013-D8B3-46EA-A7CC-EF0E1362C95C}" type="slidenum">
+            <a:fld id="{172ADF1E-2F03-4F10-B13B-4866656C7FA2}" type="slidenum">
               <a:rPr b="0" lang="ru-RU" sz="1200" spc="-1" strike="noStrike">
                 <a:latin typeface="Times New Roman"/>
               </a:rPr>
-              <a:t>&lt;номер&gt;</a:t>
+              <a:t>&lt;number&gt;</a:t>
             </a:fld>
-            <a:endParaRPr b="0" lang="ru-RU" sz="1200" spc="-1" strike="noStrike">
+            <a:endParaRPr b="0" lang="en-US" sz="1200" spc="-1" strike="noStrike">
               <a:latin typeface="Times New Roman"/>
             </a:endParaRPr>
           </a:p>
@@ -748,7 +748,7 @@
       </p:grpSpPr>
       <p:sp>
         <p:nvSpPr>
-          <p:cNvPr id="172" name="PlaceHolder 1"/>
+          <p:cNvPr id="171" name="PlaceHolder 1"/>
           <p:cNvSpPr>
             <a:spLocks noGrp="1"/>
           </p:cNvSpPr>
@@ -759,19 +759,19 @@
         <p:spPr>
           <a:xfrm>
             <a:off x="685800" y="1143000"/>
-            <a:ext cx="5485680" cy="3085560"/>
-          </a:xfrm>
-          <a:prstGeom prst="rect">
-            <a:avLst/>
-          </a:prstGeom>
-          <a:ln w="0">
-            <a:noFill/>
-          </a:ln>
-        </p:spPr>
-      </p:sp>
-      <p:sp>
-        <p:nvSpPr>
-          <p:cNvPr id="173" name="PlaceHolder 2"/>
+            <a:ext cx="5485320" cy="3085200"/>
+          </a:xfrm>
+          <a:prstGeom prst="rect">
+            <a:avLst/>
+          </a:prstGeom>
+          <a:ln w="0">
+            <a:noFill/>
+          </a:ln>
+        </p:spPr>
+      </p:sp>
+      <p:sp>
+        <p:nvSpPr>
+          <p:cNvPr id="172" name="PlaceHolder 2"/>
           <p:cNvSpPr>
             <a:spLocks noGrp="1"/>
           </p:cNvSpPr>
@@ -782,7 +782,7 @@
         <p:spPr>
           <a:xfrm>
             <a:off x="685800" y="4400640"/>
-            <a:ext cx="5485680" cy="3599640"/>
+            <a:ext cx="5485320" cy="3599280"/>
           </a:xfrm>
           <a:prstGeom prst="rect">
             <a:avLst/>
@@ -797,15 +797,15 @@
             <a:noAutofit/>
           </a:bodyPr>
           <a:p>
-            <a:endParaRPr b="0" lang="ru-RU" sz="2000" spc="-1" strike="noStrike">
-              <a:latin typeface="Arial"/>
-            </a:endParaRPr>
-          </a:p>
-        </p:txBody>
-      </p:sp>
-      <p:sp>
-        <p:nvSpPr>
-          <p:cNvPr id="174" name="PlaceHolder 3"/>
+            <a:endParaRPr b="0" lang="en-US" sz="2000" spc="-1" strike="noStrike">
+              <a:latin typeface="Arial"/>
+            </a:endParaRPr>
+          </a:p>
+        </p:txBody>
+      </p:sp>
+      <p:sp>
+        <p:nvSpPr>
+          <p:cNvPr id="173" name="PlaceHolder 3"/>
           <p:cNvSpPr>
             <a:spLocks noGrp="1"/>
           </p:cNvSpPr>
@@ -816,7 +816,7 @@
         <p:spPr>
           <a:xfrm>
             <a:off x="3884760" y="8685360"/>
-            <a:ext cx="2971080" cy="457920"/>
+            <a:ext cx="2970720" cy="457560"/>
           </a:xfrm>
           <a:prstGeom prst="rect">
             <a:avLst/>
@@ -848,13 +848,13 @@
               </a:lnSpc>
               <a:buNone/>
             </a:pPr>
-            <a:fld id="{3C18A1F2-3C88-450F-849C-86225A76B254}" type="slidenum">
+            <a:fld id="{FE5B9E0B-AFFD-4A09-AB46-B0C6B687364C}" type="slidenum">
               <a:rPr b="0" lang="ru-RU" sz="1200" spc="-1" strike="noStrike">
                 <a:latin typeface="Times New Roman"/>
               </a:rPr>
-              <a:t>&lt;номер&gt;</a:t>
+              <a:t>&lt;number&gt;</a:t>
             </a:fld>
-            <a:endParaRPr b="0" lang="ru-RU" sz="1200" spc="-1" strike="noStrike">
+            <a:endParaRPr b="0" lang="en-US" sz="1200" spc="-1" strike="noStrike">
               <a:latin typeface="Times New Roman"/>
             </a:endParaRPr>
           </a:p>
@@ -884,7 +884,7 @@
       </p:grpSpPr>
       <p:sp>
         <p:nvSpPr>
-          <p:cNvPr id="175" name="PlaceHolder 1"/>
+          <p:cNvPr id="174" name="PlaceHolder 1"/>
           <p:cNvSpPr>
             <a:spLocks noGrp="1"/>
           </p:cNvSpPr>
@@ -895,19 +895,19 @@
         <p:spPr>
           <a:xfrm>
             <a:off x="685800" y="1143000"/>
-            <a:ext cx="5485680" cy="3085560"/>
-          </a:xfrm>
-          <a:prstGeom prst="rect">
-            <a:avLst/>
-          </a:prstGeom>
-          <a:ln w="0">
-            <a:noFill/>
-          </a:ln>
-        </p:spPr>
-      </p:sp>
-      <p:sp>
-        <p:nvSpPr>
-          <p:cNvPr id="176" name="PlaceHolder 2"/>
+            <a:ext cx="5485320" cy="3085200"/>
+          </a:xfrm>
+          <a:prstGeom prst="rect">
+            <a:avLst/>
+          </a:prstGeom>
+          <a:ln w="0">
+            <a:noFill/>
+          </a:ln>
+        </p:spPr>
+      </p:sp>
+      <p:sp>
+        <p:nvSpPr>
+          <p:cNvPr id="175" name="PlaceHolder 2"/>
           <p:cNvSpPr>
             <a:spLocks noGrp="1"/>
           </p:cNvSpPr>
@@ -918,7 +918,7 @@
         <p:spPr>
           <a:xfrm>
             <a:off x="685800" y="4400640"/>
-            <a:ext cx="5485680" cy="3599640"/>
+            <a:ext cx="5485320" cy="3599280"/>
           </a:xfrm>
           <a:prstGeom prst="rect">
             <a:avLst/>
@@ -933,15 +933,15 @@
             <a:noAutofit/>
           </a:bodyPr>
           <a:p>
-            <a:endParaRPr b="0" lang="ru-RU" sz="2000" spc="-1" strike="noStrike">
-              <a:latin typeface="Arial"/>
-            </a:endParaRPr>
-          </a:p>
-        </p:txBody>
-      </p:sp>
-      <p:sp>
-        <p:nvSpPr>
-          <p:cNvPr id="177" name="PlaceHolder 3"/>
+            <a:endParaRPr b="0" lang="en-US" sz="2000" spc="-1" strike="noStrike">
+              <a:latin typeface="Arial"/>
+            </a:endParaRPr>
+          </a:p>
+        </p:txBody>
+      </p:sp>
+      <p:sp>
+        <p:nvSpPr>
+          <p:cNvPr id="176" name="PlaceHolder 3"/>
           <p:cNvSpPr>
             <a:spLocks noGrp="1"/>
           </p:cNvSpPr>
@@ -952,7 +952,7 @@
         <p:spPr>
           <a:xfrm>
             <a:off x="3884760" y="8685360"/>
-            <a:ext cx="2971080" cy="457920"/>
+            <a:ext cx="2970720" cy="457560"/>
           </a:xfrm>
           <a:prstGeom prst="rect">
             <a:avLst/>
@@ -984,13 +984,13 @@
               </a:lnSpc>
               <a:buNone/>
             </a:pPr>
-            <a:fld id="{F9C3D5D7-F0CE-40DB-8E82-6E76311AA8E6}" type="slidenum">
+            <a:fld id="{04550745-FD66-499F-83F4-5DEAB52E3636}" type="slidenum">
               <a:rPr b="0" lang="ru-RU" sz="1200" spc="-1" strike="noStrike">
                 <a:latin typeface="Times New Roman"/>
               </a:rPr>
-              <a:t>&lt;номер&gt;</a:t>
+              <a:t>&lt;number&gt;</a:t>
             </a:fld>
-            <a:endParaRPr b="0" lang="ru-RU" sz="1200" spc="-1" strike="noStrike">
+            <a:endParaRPr b="0" lang="en-US" sz="1200" spc="-1" strike="noStrike">
               <a:latin typeface="Times New Roman"/>
             </a:endParaRPr>
           </a:p>
@@ -1052,7 +1052,7 @@
         <p:txBody>
           <a:bodyPr/>
           <a:p>
-            <a:fld id="{1D2DF253-50F3-4D23-8FD7-926FADDE9564}" type="slidenum">
+            <a:fld id="{94E8B9E8-1CEA-4B70-B604-650E55AD5F5F}" type="slidenum">
               <a:t>&lt;#&gt;</a:t>
             </a:fld>
           </a:p>
@@ -1073,7 +1073,7 @@
           <a:bodyPr/>
           <a:p>
             <a:r>
-              <a:rPr lang="ru-RU"/>
+              <a:rPr lang="en-US"/>
               <a:t/>
             </a:r>
           </a:p>
@@ -1114,7 +1114,7 @@
         <p:spPr>
           <a:xfrm>
             <a:off x="1143000" y="841680"/>
-            <a:ext cx="6857280" cy="1789920"/>
+            <a:ext cx="6856920" cy="1789560"/>
           </a:xfrm>
           <a:prstGeom prst="rect">
             <a:avLst/>
@@ -1132,7 +1132,7 @@
             <a:pPr algn="ctr">
               <a:buNone/>
             </a:pPr>
-            <a:endParaRPr b="0" lang="ru-RU" sz="4400" spc="-1" strike="noStrike">
+            <a:endParaRPr b="0" lang="en-US" sz="4400" spc="-1" strike="noStrike">
               <a:latin typeface="Arial"/>
             </a:endParaRPr>
           </a:p>
@@ -1151,7 +1151,7 @@
         <p:spPr>
           <a:xfrm>
             <a:off x="457200" y="1203480"/>
-            <a:ext cx="8229240" cy="1422720"/>
+            <a:ext cx="8228880" cy="1422360"/>
           </a:xfrm>
           <a:prstGeom prst="rect">
             <a:avLst/>
@@ -1166,7 +1166,7 @@
             <a:normAutofit/>
           </a:bodyPr>
           <a:p>
-            <a:endParaRPr b="0" lang="ru-RU" sz="3200" spc="-1" strike="noStrike">
+            <a:endParaRPr b="0" lang="en-US" sz="3200" spc="-1" strike="noStrike">
               <a:latin typeface="Arial"/>
             </a:endParaRPr>
           </a:p>
@@ -1184,8 +1184,8 @@
         </p:nvSpPr>
         <p:spPr>
           <a:xfrm>
-            <a:off x="457200" y="2761920"/>
-            <a:ext cx="8229240" cy="1422720"/>
+            <a:off x="457200" y="2761200"/>
+            <a:ext cx="8228880" cy="1422360"/>
           </a:xfrm>
           <a:prstGeom prst="rect">
             <a:avLst/>
@@ -1200,7 +1200,7 @@
             <a:normAutofit/>
           </a:bodyPr>
           <a:p>
-            <a:endParaRPr b="0" lang="ru-RU" sz="3200" spc="-1" strike="noStrike">
+            <a:endParaRPr b="0" lang="en-US" sz="3200" spc="-1" strike="noStrike">
               <a:latin typeface="Arial"/>
             </a:endParaRPr>
           </a:p>
@@ -1240,7 +1240,7 @@
         <p:txBody>
           <a:bodyPr/>
           <a:p>
-            <a:fld id="{A3E76490-D3EE-4484-8C77-22A1FE9D6A4C}" type="slidenum">
+            <a:fld id="{19D0B66B-36D8-4D56-8370-EB6C96B1EBCE}" type="slidenum">
               <a:t>&lt;#&gt;</a:t>
             </a:fld>
           </a:p>
@@ -1261,7 +1261,7 @@
           <a:bodyPr/>
           <a:p>
             <a:r>
-              <a:rPr lang="ru-RU"/>
+              <a:rPr lang="en-US"/>
               <a:t/>
             </a:r>
           </a:p>
@@ -1302,7 +1302,7 @@
         <p:spPr>
           <a:xfrm>
             <a:off x="1143000" y="841680"/>
-            <a:ext cx="6857280" cy="1789920"/>
+            <a:ext cx="6856920" cy="1789560"/>
           </a:xfrm>
           <a:prstGeom prst="rect">
             <a:avLst/>
@@ -1320,7 +1320,7 @@
             <a:pPr algn="ctr">
               <a:buNone/>
             </a:pPr>
-            <a:endParaRPr b="0" lang="ru-RU" sz="4400" spc="-1" strike="noStrike">
+            <a:endParaRPr b="0" lang="en-US" sz="4400" spc="-1" strike="noStrike">
               <a:latin typeface="Arial"/>
             </a:endParaRPr>
           </a:p>
@@ -1339,7 +1339,7 @@
         <p:spPr>
           <a:xfrm>
             <a:off x="457200" y="1203480"/>
-            <a:ext cx="4015800" cy="1422720"/>
+            <a:ext cx="4015440" cy="1422360"/>
           </a:xfrm>
           <a:prstGeom prst="rect">
             <a:avLst/>
@@ -1354,7 +1354,7 @@
             <a:normAutofit/>
           </a:bodyPr>
           <a:p>
-            <a:endParaRPr b="0" lang="ru-RU" sz="3200" spc="-1" strike="noStrike">
+            <a:endParaRPr b="0" lang="en-US" sz="3200" spc="-1" strike="noStrike">
               <a:latin typeface="Arial"/>
             </a:endParaRPr>
           </a:p>
@@ -1372,8 +1372,8 @@
         </p:nvSpPr>
         <p:spPr>
           <a:xfrm>
-            <a:off x="4674240" y="1203480"/>
-            <a:ext cx="4015800" cy="1422720"/>
+            <a:off x="4673880" y="1203480"/>
+            <a:ext cx="4015440" cy="1422360"/>
           </a:xfrm>
           <a:prstGeom prst="rect">
             <a:avLst/>
@@ -1388,7 +1388,7 @@
             <a:normAutofit/>
           </a:bodyPr>
           <a:p>
-            <a:endParaRPr b="0" lang="ru-RU" sz="3200" spc="-1" strike="noStrike">
+            <a:endParaRPr b="0" lang="en-US" sz="3200" spc="-1" strike="noStrike">
               <a:latin typeface="Arial"/>
             </a:endParaRPr>
           </a:p>
@@ -1406,8 +1406,8 @@
         </p:nvSpPr>
         <p:spPr>
           <a:xfrm>
-            <a:off x="457200" y="2761920"/>
-            <a:ext cx="4015800" cy="1422720"/>
+            <a:off x="457200" y="2761200"/>
+            <a:ext cx="4015440" cy="1422360"/>
           </a:xfrm>
           <a:prstGeom prst="rect">
             <a:avLst/>
@@ -1422,7 +1422,7 @@
             <a:normAutofit/>
           </a:bodyPr>
           <a:p>
-            <a:endParaRPr b="0" lang="ru-RU" sz="3200" spc="-1" strike="noStrike">
+            <a:endParaRPr b="0" lang="en-US" sz="3200" spc="-1" strike="noStrike">
               <a:latin typeface="Arial"/>
             </a:endParaRPr>
           </a:p>
@@ -1440,8 +1440,8 @@
         </p:nvSpPr>
         <p:spPr>
           <a:xfrm>
-            <a:off x="4674240" y="2761920"/>
-            <a:ext cx="4015800" cy="1422720"/>
+            <a:off x="4673880" y="2761200"/>
+            <a:ext cx="4015440" cy="1422360"/>
           </a:xfrm>
           <a:prstGeom prst="rect">
             <a:avLst/>
@@ -1456,7 +1456,7 @@
             <a:normAutofit/>
           </a:bodyPr>
           <a:p>
-            <a:endParaRPr b="0" lang="ru-RU" sz="3200" spc="-1" strike="noStrike">
+            <a:endParaRPr b="0" lang="en-US" sz="3200" spc="-1" strike="noStrike">
               <a:latin typeface="Arial"/>
             </a:endParaRPr>
           </a:p>
@@ -1496,7 +1496,7 @@
         <p:txBody>
           <a:bodyPr/>
           <a:p>
-            <a:fld id="{A9D26C9F-A592-43FD-A80A-662A46A8FFFF}" type="slidenum">
+            <a:fld id="{6B7CC8CC-FFB6-4194-8CC3-0ED46E85C348}" type="slidenum">
               <a:t>&lt;#&gt;</a:t>
             </a:fld>
           </a:p>
@@ -1517,7 +1517,7 @@
           <a:bodyPr/>
           <a:p>
             <a:r>
-              <a:rPr lang="ru-RU"/>
+              <a:rPr lang="en-US"/>
               <a:t/>
             </a:r>
           </a:p>
@@ -1558,7 +1558,7 @@
         <p:spPr>
           <a:xfrm>
             <a:off x="1143000" y="841680"/>
-            <a:ext cx="6857280" cy="1789920"/>
+            <a:ext cx="6856920" cy="1789560"/>
           </a:xfrm>
           <a:prstGeom prst="rect">
             <a:avLst/>
@@ -1576,7 +1576,7 @@
             <a:pPr algn="ctr">
               <a:buNone/>
             </a:pPr>
-            <a:endParaRPr b="0" lang="ru-RU" sz="4400" spc="-1" strike="noStrike">
+            <a:endParaRPr b="0" lang="en-US" sz="4400" spc="-1" strike="noStrike">
               <a:latin typeface="Arial"/>
             </a:endParaRPr>
           </a:p>
@@ -1595,7 +1595,7 @@
         <p:spPr>
           <a:xfrm>
             <a:off x="457200" y="1203480"/>
-            <a:ext cx="2649600" cy="1422720"/>
+            <a:ext cx="2649600" cy="1422360"/>
           </a:xfrm>
           <a:prstGeom prst="rect">
             <a:avLst/>
@@ -1607,10 +1607,10 @@
         </p:spPr>
         <p:txBody>
           <a:bodyPr lIns="0" rIns="0" tIns="0" bIns="0" anchor="t">
-            <a:normAutofit fontScale="73000"/>
-          </a:bodyPr>
-          <a:p>
-            <a:endParaRPr b="0" lang="ru-RU" sz="3200" spc="-1" strike="noStrike">
+            <a:normAutofit/>
+          </a:bodyPr>
+          <a:p>
+            <a:endParaRPr b="0" lang="en-US" sz="3200" spc="-1" strike="noStrike">
               <a:latin typeface="Arial"/>
             </a:endParaRPr>
           </a:p>
@@ -1629,7 +1629,7 @@
         <p:spPr>
           <a:xfrm>
             <a:off x="3239640" y="1203480"/>
-            <a:ext cx="2649600" cy="1422720"/>
+            <a:ext cx="2649600" cy="1422360"/>
           </a:xfrm>
           <a:prstGeom prst="rect">
             <a:avLst/>
@@ -1641,10 +1641,10 @@
         </p:spPr>
         <p:txBody>
           <a:bodyPr lIns="0" rIns="0" tIns="0" bIns="0" anchor="t">
-            <a:normAutofit fontScale="73000"/>
-          </a:bodyPr>
-          <a:p>
-            <a:endParaRPr b="0" lang="ru-RU" sz="3200" spc="-1" strike="noStrike">
+            <a:normAutofit/>
+          </a:bodyPr>
+          <a:p>
+            <a:endParaRPr b="0" lang="en-US" sz="3200" spc="-1" strike="noStrike">
               <a:latin typeface="Arial"/>
             </a:endParaRPr>
           </a:p>
@@ -1663,7 +1663,7 @@
         <p:spPr>
           <a:xfrm>
             <a:off x="6022080" y="1203480"/>
-            <a:ext cx="2649600" cy="1422720"/>
+            <a:ext cx="2649600" cy="1422360"/>
           </a:xfrm>
           <a:prstGeom prst="rect">
             <a:avLst/>
@@ -1675,10 +1675,10 @@
         </p:spPr>
         <p:txBody>
           <a:bodyPr lIns="0" rIns="0" tIns="0" bIns="0" anchor="t">
-            <a:normAutofit fontScale="73000"/>
-          </a:bodyPr>
-          <a:p>
-            <a:endParaRPr b="0" lang="ru-RU" sz="3200" spc="-1" strike="noStrike">
+            <a:normAutofit/>
+          </a:bodyPr>
+          <a:p>
+            <a:endParaRPr b="0" lang="en-US" sz="3200" spc="-1" strike="noStrike">
               <a:latin typeface="Arial"/>
             </a:endParaRPr>
           </a:p>
@@ -1696,8 +1696,8 @@
         </p:nvSpPr>
         <p:spPr>
           <a:xfrm>
-            <a:off x="457200" y="2761920"/>
-            <a:ext cx="2649600" cy="1422720"/>
+            <a:off x="457200" y="2761200"/>
+            <a:ext cx="2649600" cy="1422360"/>
           </a:xfrm>
           <a:prstGeom prst="rect">
             <a:avLst/>
@@ -1709,10 +1709,10 @@
         </p:spPr>
         <p:txBody>
           <a:bodyPr lIns="0" rIns="0" tIns="0" bIns="0" anchor="t">
-            <a:normAutofit fontScale="73000"/>
-          </a:bodyPr>
-          <a:p>
-            <a:endParaRPr b="0" lang="ru-RU" sz="3200" spc="-1" strike="noStrike">
+            <a:normAutofit/>
+          </a:bodyPr>
+          <a:p>
+            <a:endParaRPr b="0" lang="en-US" sz="3200" spc="-1" strike="noStrike">
               <a:latin typeface="Arial"/>
             </a:endParaRPr>
           </a:p>
@@ -1730,8 +1730,8 @@
         </p:nvSpPr>
         <p:spPr>
           <a:xfrm>
-            <a:off x="3239640" y="2761920"/>
-            <a:ext cx="2649600" cy="1422720"/>
+            <a:off x="3239640" y="2761200"/>
+            <a:ext cx="2649600" cy="1422360"/>
           </a:xfrm>
           <a:prstGeom prst="rect">
             <a:avLst/>
@@ -1743,10 +1743,10 @@
         </p:spPr>
         <p:txBody>
           <a:bodyPr lIns="0" rIns="0" tIns="0" bIns="0" anchor="t">
-            <a:normAutofit fontScale="73000"/>
-          </a:bodyPr>
-          <a:p>
-            <a:endParaRPr b="0" lang="ru-RU" sz="3200" spc="-1" strike="noStrike">
+            <a:normAutofit/>
+          </a:bodyPr>
+          <a:p>
+            <a:endParaRPr b="0" lang="en-US" sz="3200" spc="-1" strike="noStrike">
               <a:latin typeface="Arial"/>
             </a:endParaRPr>
           </a:p>
@@ -1764,8 +1764,8 @@
         </p:nvSpPr>
         <p:spPr>
           <a:xfrm>
-            <a:off x="6022080" y="2761920"/>
-            <a:ext cx="2649600" cy="1422720"/>
+            <a:off x="6022080" y="2761200"/>
+            <a:ext cx="2649600" cy="1422360"/>
           </a:xfrm>
           <a:prstGeom prst="rect">
             <a:avLst/>
@@ -1777,10 +1777,10 @@
         </p:spPr>
         <p:txBody>
           <a:bodyPr lIns="0" rIns="0" tIns="0" bIns="0" anchor="t">
-            <a:normAutofit fontScale="73000"/>
-          </a:bodyPr>
-          <a:p>
-            <a:endParaRPr b="0" lang="ru-RU" sz="3200" spc="-1" strike="noStrike">
+            <a:normAutofit/>
+          </a:bodyPr>
+          <a:p>
+            <a:endParaRPr b="0" lang="en-US" sz="3200" spc="-1" strike="noStrike">
               <a:latin typeface="Arial"/>
             </a:endParaRPr>
           </a:p>
@@ -1820,7 +1820,7 @@
         <p:txBody>
           <a:bodyPr/>
           <a:p>
-            <a:fld id="{C14D61A6-4C6B-4BA6-B816-1D25BAE1F419}" type="slidenum">
+            <a:fld id="{10DBAA15-8C75-41D9-B85B-726E625F5B8D}" type="slidenum">
               <a:t>&lt;#&gt;</a:t>
             </a:fld>
           </a:p>
@@ -1841,7 +1841,7 @@
           <a:bodyPr/>
           <a:p>
             <a:r>
-              <a:rPr lang="ru-RU"/>
+              <a:rPr lang="en-US"/>
               <a:t/>
             </a:r>
           </a:p>
@@ -1882,7 +1882,7 @@
         <p:spPr>
           <a:xfrm>
             <a:off x="1143000" y="841680"/>
-            <a:ext cx="6857280" cy="1789920"/>
+            <a:ext cx="6856920" cy="1789560"/>
           </a:xfrm>
           <a:prstGeom prst="rect">
             <a:avLst/>
@@ -1900,7 +1900,7 @@
             <a:pPr algn="ctr">
               <a:buNone/>
             </a:pPr>
-            <a:endParaRPr b="0" lang="ru-RU" sz="4400" spc="-1" strike="noStrike">
+            <a:endParaRPr b="0" lang="en-US" sz="4400" spc="-1" strike="noStrike">
               <a:latin typeface="Arial"/>
             </a:endParaRPr>
           </a:p>
@@ -1919,7 +1919,7 @@
         <p:spPr>
           <a:xfrm>
             <a:off x="457200" y="1203480"/>
-            <a:ext cx="8229240" cy="2982960"/>
+            <a:ext cx="8228880" cy="2982600"/>
           </a:xfrm>
           <a:prstGeom prst="rect">
             <a:avLst/>
@@ -1937,7 +1937,7 @@
             <a:pPr algn="ctr">
               <a:buNone/>
             </a:pPr>
-            <a:endParaRPr b="0" lang="ru-RU" sz="3200" spc="-1" strike="noStrike">
+            <a:endParaRPr b="0" lang="en-US" sz="3200" spc="-1" strike="noStrike">
               <a:latin typeface="Arial"/>
             </a:endParaRPr>
           </a:p>
@@ -1977,7 +1977,7 @@
         <p:txBody>
           <a:bodyPr/>
           <a:p>
-            <a:fld id="{24ED943A-FCC0-4191-8F76-B1904244A99C}" type="slidenum">
+            <a:fld id="{007575D5-FCB4-4075-9C36-FB109A8B5D6A}" type="slidenum">
               <a:t>&lt;#&gt;</a:t>
             </a:fld>
           </a:p>
@@ -1998,7 +1998,7 @@
           <a:bodyPr/>
           <a:p>
             <a:r>
-              <a:rPr lang="ru-RU"/>
+              <a:rPr lang="en-US"/>
               <a:t/>
             </a:r>
           </a:p>
@@ -2039,7 +2039,7 @@
         <p:spPr>
           <a:xfrm>
             <a:off x="1143000" y="841680"/>
-            <a:ext cx="6857280" cy="1789920"/>
+            <a:ext cx="6856920" cy="1789560"/>
           </a:xfrm>
           <a:prstGeom prst="rect">
             <a:avLst/>
@@ -2057,7 +2057,7 @@
             <a:pPr algn="ctr">
               <a:buNone/>
             </a:pPr>
-            <a:endParaRPr b="0" lang="ru-RU" sz="4400" spc="-1" strike="noStrike">
+            <a:endParaRPr b="0" lang="en-US" sz="4400" spc="-1" strike="noStrike">
               <a:latin typeface="Arial"/>
             </a:endParaRPr>
           </a:p>
@@ -2076,7 +2076,7 @@
         <p:spPr>
           <a:xfrm>
             <a:off x="457200" y="1203480"/>
-            <a:ext cx="8229240" cy="2982960"/>
+            <a:ext cx="8228880" cy="2982600"/>
           </a:xfrm>
           <a:prstGeom prst="rect">
             <a:avLst/>
@@ -2091,7 +2091,7 @@
             <a:normAutofit/>
           </a:bodyPr>
           <a:p>
-            <a:endParaRPr b="0" lang="ru-RU" sz="3200" spc="-1" strike="noStrike">
+            <a:endParaRPr b="0" lang="en-US" sz="3200" spc="-1" strike="noStrike">
               <a:latin typeface="Arial"/>
             </a:endParaRPr>
           </a:p>
@@ -2131,7 +2131,7 @@
         <p:txBody>
           <a:bodyPr/>
           <a:p>
-            <a:fld id="{3FE65BB9-5D24-46D4-B031-28025B865FB9}" type="slidenum">
+            <a:fld id="{C5AE5C97-11A6-462A-AEA7-493EF7F1506E}" type="slidenum">
               <a:t>&lt;#&gt;</a:t>
             </a:fld>
           </a:p>
@@ -2152,7 +2152,7 @@
           <a:bodyPr/>
           <a:p>
             <a:r>
-              <a:rPr lang="ru-RU"/>
+              <a:rPr lang="en-US"/>
               <a:t/>
             </a:r>
           </a:p>
@@ -2193,7 +2193,7 @@
         <p:spPr>
           <a:xfrm>
             <a:off x="1143000" y="841680"/>
-            <a:ext cx="6857280" cy="1789920"/>
+            <a:ext cx="6856920" cy="1789560"/>
           </a:xfrm>
           <a:prstGeom prst="rect">
             <a:avLst/>
@@ -2211,7 +2211,7 @@
             <a:pPr algn="ctr">
               <a:buNone/>
             </a:pPr>
-            <a:endParaRPr b="0" lang="ru-RU" sz="4400" spc="-1" strike="noStrike">
+            <a:endParaRPr b="0" lang="en-US" sz="4400" spc="-1" strike="noStrike">
               <a:latin typeface="Arial"/>
             </a:endParaRPr>
           </a:p>
@@ -2230,7 +2230,7 @@
         <p:spPr>
           <a:xfrm>
             <a:off x="457200" y="1203480"/>
-            <a:ext cx="4015800" cy="2982960"/>
+            <a:ext cx="4015440" cy="2982600"/>
           </a:xfrm>
           <a:prstGeom prst="rect">
             <a:avLst/>
@@ -2245,7 +2245,7 @@
             <a:normAutofit/>
           </a:bodyPr>
           <a:p>
-            <a:endParaRPr b="0" lang="ru-RU" sz="3200" spc="-1" strike="noStrike">
+            <a:endParaRPr b="0" lang="en-US" sz="3200" spc="-1" strike="noStrike">
               <a:latin typeface="Arial"/>
             </a:endParaRPr>
           </a:p>
@@ -2263,8 +2263,8 @@
         </p:nvSpPr>
         <p:spPr>
           <a:xfrm>
-            <a:off x="4674240" y="1203480"/>
-            <a:ext cx="4015800" cy="2982960"/>
+            <a:off x="4673880" y="1203480"/>
+            <a:ext cx="4015440" cy="2982600"/>
           </a:xfrm>
           <a:prstGeom prst="rect">
             <a:avLst/>
@@ -2279,7 +2279,7 @@
             <a:normAutofit/>
           </a:bodyPr>
           <a:p>
-            <a:endParaRPr b="0" lang="ru-RU" sz="3200" spc="-1" strike="noStrike">
+            <a:endParaRPr b="0" lang="en-US" sz="3200" spc="-1" strike="noStrike">
               <a:latin typeface="Arial"/>
             </a:endParaRPr>
           </a:p>
@@ -2319,7 +2319,7 @@
         <p:txBody>
           <a:bodyPr/>
           <a:p>
-            <a:fld id="{758660F6-FCB0-453A-B584-4F551FE8BADB}" type="slidenum">
+            <a:fld id="{906E8B6F-F939-4127-9778-BA23AF98C15E}" type="slidenum">
               <a:t>&lt;#&gt;</a:t>
             </a:fld>
           </a:p>
@@ -2340,7 +2340,7 @@
           <a:bodyPr/>
           <a:p>
             <a:r>
-              <a:rPr lang="ru-RU"/>
+              <a:rPr lang="en-US"/>
               <a:t/>
             </a:r>
           </a:p>
@@ -2381,7 +2381,7 @@
         <p:spPr>
           <a:xfrm>
             <a:off x="1143000" y="841680"/>
-            <a:ext cx="6857280" cy="1789920"/>
+            <a:ext cx="6856920" cy="1789560"/>
           </a:xfrm>
           <a:prstGeom prst="rect">
             <a:avLst/>
@@ -2399,7 +2399,7 @@
             <a:pPr algn="ctr">
               <a:buNone/>
             </a:pPr>
-            <a:endParaRPr b="0" lang="ru-RU" sz="4400" spc="-1" strike="noStrike">
+            <a:endParaRPr b="0" lang="en-US" sz="4400" spc="-1" strike="noStrike">
               <a:latin typeface="Arial"/>
             </a:endParaRPr>
           </a:p>
@@ -2439,7 +2439,7 @@
         <p:txBody>
           <a:bodyPr/>
           <a:p>
-            <a:fld id="{1D2BC619-1FFB-4350-B911-31374D8AC32D}" type="slidenum">
+            <a:fld id="{DD6531CB-9549-4E8B-A803-249DB0E30B9F}" type="slidenum">
               <a:t>&lt;#&gt;</a:t>
             </a:fld>
           </a:p>
@@ -2460,7 +2460,7 @@
           <a:bodyPr/>
           <a:p>
             <a:r>
-              <a:rPr lang="ru-RU"/>
+              <a:rPr lang="en-US"/>
               <a:t/>
             </a:r>
           </a:p>
@@ -2501,7 +2501,7 @@
         <p:spPr>
           <a:xfrm>
             <a:off x="1143000" y="841680"/>
-            <a:ext cx="6857280" cy="8298360"/>
+            <a:ext cx="6856920" cy="8296560"/>
           </a:xfrm>
           <a:prstGeom prst="rect">
             <a:avLst/>
@@ -2519,7 +2519,7 @@
             <a:pPr algn="ctr">
               <a:buNone/>
             </a:pPr>
-            <a:endParaRPr b="0" lang="ru-RU" sz="3200" spc="-1" strike="noStrike">
+            <a:endParaRPr b="0" lang="en-US" sz="3200" spc="-1" strike="noStrike">
               <a:latin typeface="Arial"/>
             </a:endParaRPr>
           </a:p>
@@ -2559,7 +2559,7 @@
         <p:txBody>
           <a:bodyPr/>
           <a:p>
-            <a:fld id="{071C5A7F-5D1F-4188-AD9A-041A350AEC90}" type="slidenum">
+            <a:fld id="{27731D30-1A6A-4F9B-AF74-AFFAAEA8B3ED}" type="slidenum">
               <a:t>&lt;#&gt;</a:t>
             </a:fld>
           </a:p>
@@ -2580,7 +2580,7 @@
           <a:bodyPr/>
           <a:p>
             <a:r>
-              <a:rPr lang="ru-RU"/>
+              <a:rPr lang="en-US"/>
               <a:t/>
             </a:r>
           </a:p>
@@ -2621,7 +2621,7 @@
         <p:spPr>
           <a:xfrm>
             <a:off x="1143000" y="841680"/>
-            <a:ext cx="6857280" cy="1789920"/>
+            <a:ext cx="6856920" cy="1789560"/>
           </a:xfrm>
           <a:prstGeom prst="rect">
             <a:avLst/>
@@ -2639,7 +2639,7 @@
             <a:pPr algn="ctr">
               <a:buNone/>
             </a:pPr>
-            <a:endParaRPr b="0" lang="ru-RU" sz="4400" spc="-1" strike="noStrike">
+            <a:endParaRPr b="0" lang="en-US" sz="4400" spc="-1" strike="noStrike">
               <a:latin typeface="Arial"/>
             </a:endParaRPr>
           </a:p>
@@ -2658,7 +2658,7 @@
         <p:spPr>
           <a:xfrm>
             <a:off x="457200" y="1203480"/>
-            <a:ext cx="4015800" cy="1422720"/>
+            <a:ext cx="4015440" cy="1422360"/>
           </a:xfrm>
           <a:prstGeom prst="rect">
             <a:avLst/>
@@ -2673,7 +2673,7 @@
             <a:normAutofit/>
           </a:bodyPr>
           <a:p>
-            <a:endParaRPr b="0" lang="ru-RU" sz="3200" spc="-1" strike="noStrike">
+            <a:endParaRPr b="0" lang="en-US" sz="3200" spc="-1" strike="noStrike">
               <a:latin typeface="Arial"/>
             </a:endParaRPr>
           </a:p>
@@ -2691,8 +2691,8 @@
         </p:nvSpPr>
         <p:spPr>
           <a:xfrm>
-            <a:off x="4674240" y="1203480"/>
-            <a:ext cx="4015800" cy="2982960"/>
+            <a:off x="4673880" y="1203480"/>
+            <a:ext cx="4015440" cy="2982600"/>
           </a:xfrm>
           <a:prstGeom prst="rect">
             <a:avLst/>
@@ -2707,7 +2707,7 @@
             <a:normAutofit/>
           </a:bodyPr>
           <a:p>
-            <a:endParaRPr b="0" lang="ru-RU" sz="3200" spc="-1" strike="noStrike">
+            <a:endParaRPr b="0" lang="en-US" sz="3200" spc="-1" strike="noStrike">
               <a:latin typeface="Arial"/>
             </a:endParaRPr>
           </a:p>
@@ -2725,8 +2725,8 @@
         </p:nvSpPr>
         <p:spPr>
           <a:xfrm>
-            <a:off x="457200" y="2761920"/>
-            <a:ext cx="4015800" cy="1422720"/>
+            <a:off x="457200" y="2761200"/>
+            <a:ext cx="4015440" cy="1422360"/>
           </a:xfrm>
           <a:prstGeom prst="rect">
             <a:avLst/>
@@ -2741,7 +2741,7 @@
             <a:normAutofit/>
           </a:bodyPr>
           <a:p>
-            <a:endParaRPr b="0" lang="ru-RU" sz="3200" spc="-1" strike="noStrike">
+            <a:endParaRPr b="0" lang="en-US" sz="3200" spc="-1" strike="noStrike">
               <a:latin typeface="Arial"/>
             </a:endParaRPr>
           </a:p>
@@ -2781,7 +2781,7 @@
         <p:txBody>
           <a:bodyPr/>
           <a:p>
-            <a:fld id="{E0A31CF4-8F12-4FE7-83F9-B2CBB542CD48}" type="slidenum">
+            <a:fld id="{F3BDD363-07DA-497E-A846-24CBF29FBDF2}" type="slidenum">
               <a:t>&lt;#&gt;</a:t>
             </a:fld>
           </a:p>
@@ -2802,7 +2802,7 @@
           <a:bodyPr/>
           <a:p>
             <a:r>
-              <a:rPr lang="ru-RU"/>
+              <a:rPr lang="en-US"/>
               <a:t/>
             </a:r>
           </a:p>
@@ -2843,7 +2843,7 @@
         <p:spPr>
           <a:xfrm>
             <a:off x="1143000" y="841680"/>
-            <a:ext cx="6857280" cy="1789920"/>
+            <a:ext cx="6856920" cy="1789560"/>
           </a:xfrm>
           <a:prstGeom prst="rect">
             <a:avLst/>
@@ -2861,7 +2861,7 @@
             <a:pPr algn="ctr">
               <a:buNone/>
             </a:pPr>
-            <a:endParaRPr b="0" lang="ru-RU" sz="4400" spc="-1" strike="noStrike">
+            <a:endParaRPr b="0" lang="en-US" sz="4400" spc="-1" strike="noStrike">
               <a:latin typeface="Arial"/>
             </a:endParaRPr>
           </a:p>
@@ -2880,7 +2880,7 @@
         <p:spPr>
           <a:xfrm>
             <a:off x="457200" y="1203480"/>
-            <a:ext cx="4015800" cy="2982960"/>
+            <a:ext cx="4015440" cy="2982600"/>
           </a:xfrm>
           <a:prstGeom prst="rect">
             <a:avLst/>
@@ -2895,7 +2895,7 @@
             <a:normAutofit/>
           </a:bodyPr>
           <a:p>
-            <a:endParaRPr b="0" lang="ru-RU" sz="3200" spc="-1" strike="noStrike">
+            <a:endParaRPr b="0" lang="en-US" sz="3200" spc="-1" strike="noStrike">
               <a:latin typeface="Arial"/>
             </a:endParaRPr>
           </a:p>
@@ -2913,8 +2913,8 @@
         </p:nvSpPr>
         <p:spPr>
           <a:xfrm>
-            <a:off x="4674240" y="1203480"/>
-            <a:ext cx="4015800" cy="1422720"/>
+            <a:off x="4673880" y="1203480"/>
+            <a:ext cx="4015440" cy="1422360"/>
           </a:xfrm>
           <a:prstGeom prst="rect">
             <a:avLst/>
@@ -2929,7 +2929,7 @@
             <a:normAutofit/>
           </a:bodyPr>
           <a:p>
-            <a:endParaRPr b="0" lang="ru-RU" sz="3200" spc="-1" strike="noStrike">
+            <a:endParaRPr b="0" lang="en-US" sz="3200" spc="-1" strike="noStrike">
               <a:latin typeface="Arial"/>
             </a:endParaRPr>
           </a:p>
@@ -2947,8 +2947,8 @@
         </p:nvSpPr>
         <p:spPr>
           <a:xfrm>
-            <a:off x="4674240" y="2761920"/>
-            <a:ext cx="4015800" cy="1422720"/>
+            <a:off x="4673880" y="2761200"/>
+            <a:ext cx="4015440" cy="1422360"/>
           </a:xfrm>
           <a:prstGeom prst="rect">
             <a:avLst/>
@@ -2963,7 +2963,7 @@
             <a:normAutofit/>
           </a:bodyPr>
           <a:p>
-            <a:endParaRPr b="0" lang="ru-RU" sz="3200" spc="-1" strike="noStrike">
+            <a:endParaRPr b="0" lang="en-US" sz="3200" spc="-1" strike="noStrike">
               <a:latin typeface="Arial"/>
             </a:endParaRPr>
           </a:p>
@@ -3003,7 +3003,7 @@
         <p:txBody>
           <a:bodyPr/>
           <a:p>
-            <a:fld id="{AB55DE66-18C3-4D25-93F1-DF899B457ABA}" type="slidenum">
+            <a:fld id="{2586C613-89FC-4BD2-B1B4-1CB78FB234FA}" type="slidenum">
               <a:t>&lt;#&gt;</a:t>
             </a:fld>
           </a:p>
@@ -3024,7 +3024,7 @@
           <a:bodyPr/>
           <a:p>
             <a:r>
-              <a:rPr lang="ru-RU"/>
+              <a:rPr lang="en-US"/>
               <a:t/>
             </a:r>
           </a:p>
@@ -3065,7 +3065,7 @@
         <p:spPr>
           <a:xfrm>
             <a:off x="1143000" y="841680"/>
-            <a:ext cx="6857280" cy="1789920"/>
+            <a:ext cx="6856920" cy="1789560"/>
           </a:xfrm>
           <a:prstGeom prst="rect">
             <a:avLst/>
@@ -3083,7 +3083,7 @@
             <a:pPr algn="ctr">
               <a:buNone/>
             </a:pPr>
-            <a:endParaRPr b="0" lang="ru-RU" sz="4400" spc="-1" strike="noStrike">
+            <a:endParaRPr b="0" lang="en-US" sz="4400" spc="-1" strike="noStrike">
               <a:latin typeface="Arial"/>
             </a:endParaRPr>
           </a:p>
@@ -3102,7 +3102,7 @@
         <p:spPr>
           <a:xfrm>
             <a:off x="457200" y="1203480"/>
-            <a:ext cx="4015800" cy="1422720"/>
+            <a:ext cx="4015440" cy="1422360"/>
           </a:xfrm>
           <a:prstGeom prst="rect">
             <a:avLst/>
@@ -3117,7 +3117,7 @@
             <a:normAutofit/>
           </a:bodyPr>
           <a:p>
-            <a:endParaRPr b="0" lang="ru-RU" sz="3200" spc="-1" strike="noStrike">
+            <a:endParaRPr b="0" lang="en-US" sz="3200" spc="-1" strike="noStrike">
               <a:latin typeface="Arial"/>
             </a:endParaRPr>
           </a:p>
@@ -3135,8 +3135,8 @@
         </p:nvSpPr>
         <p:spPr>
           <a:xfrm>
-            <a:off x="4674240" y="1203480"/>
-            <a:ext cx="4015800" cy="1422720"/>
+            <a:off x="4673880" y="1203480"/>
+            <a:ext cx="4015440" cy="1422360"/>
           </a:xfrm>
           <a:prstGeom prst="rect">
             <a:avLst/>
@@ -3151,7 +3151,7 @@
             <a:normAutofit/>
           </a:bodyPr>
           <a:p>
-            <a:endParaRPr b="0" lang="ru-RU" sz="3200" spc="-1" strike="noStrike">
+            <a:endParaRPr b="0" lang="en-US" sz="3200" spc="-1" strike="noStrike">
               <a:latin typeface="Arial"/>
             </a:endParaRPr>
           </a:p>
@@ -3169,8 +3169,8 @@
         </p:nvSpPr>
         <p:spPr>
           <a:xfrm>
-            <a:off x="457200" y="2761920"/>
-            <a:ext cx="8229240" cy="1422720"/>
+            <a:off x="457200" y="2761200"/>
+            <a:ext cx="8228880" cy="1422360"/>
           </a:xfrm>
           <a:prstGeom prst="rect">
             <a:avLst/>
@@ -3185,7 +3185,7 @@
             <a:normAutofit/>
           </a:bodyPr>
           <a:p>
-            <a:endParaRPr b="0" lang="ru-RU" sz="3200" spc="-1" strike="noStrike">
+            <a:endParaRPr b="0" lang="en-US" sz="3200" spc="-1" strike="noStrike">
               <a:latin typeface="Arial"/>
             </a:endParaRPr>
           </a:p>
@@ -3225,7 +3225,7 @@
         <p:txBody>
           <a:bodyPr/>
           <a:p>
-            <a:fld id="{93109627-4C85-4E21-AD3E-213BB2320753}" type="slidenum">
+            <a:fld id="{CDCC966B-CA2F-4D8F-BD2D-0EFE0800ED0D}" type="slidenum">
               <a:t>&lt;#&gt;</a:t>
             </a:fld>
           </a:p>
@@ -3246,7 +3246,7 @@
           <a:bodyPr/>
           <a:p>
             <a:r>
-              <a:rPr lang="ru-RU"/>
+              <a:rPr lang="en-US"/>
               <a:t/>
             </a:r>
           </a:p>
@@ -3294,7 +3294,7 @@
         <p:spPr>
           <a:xfrm>
             <a:off x="1143000" y="841680"/>
-            <a:ext cx="6857280" cy="1789920"/>
+            <a:ext cx="6856920" cy="1789560"/>
           </a:xfrm>
           <a:prstGeom prst="rect">
             <a:avLst/>
@@ -3310,12 +3310,12 @@
           </a:bodyPr>
           <a:p>
             <a:r>
-              <a:rPr b="0" lang="ru-RU" sz="1800" spc="-1" strike="noStrike">
-                <a:latin typeface="Arial"/>
-              </a:rPr>
-              <a:t>Для правки текста заглавия щёлкните мышью</a:t>
-            </a:r>
-            <a:endParaRPr b="0" lang="ru-RU" sz="1800" spc="-1" strike="noStrike">
+              <a:rPr b="0" lang="en-US" sz="1800" spc="-1" strike="noStrike">
+                <a:latin typeface="Arial"/>
+              </a:rPr>
+              <a:t>Click to edit the title text format</a:t>
+            </a:r>
+            <a:endParaRPr b="0" lang="en-US" sz="1800" spc="-1" strike="noStrike">
               <a:latin typeface="Arial"/>
             </a:endParaRPr>
           </a:p>
@@ -3324,173 +3324,6 @@
       <p:sp>
         <p:nvSpPr>
           <p:cNvPr id="1" name="PlaceHolder 2"/>
-          <p:cNvSpPr>
-            <a:spLocks noGrp="1"/>
-          </p:cNvSpPr>
-          <p:nvPr>
-            <p:ph type="ftr" idx="1"/>
-          </p:nvPr>
-        </p:nvSpPr>
-        <p:spPr>
-          <a:xfrm>
-            <a:off x="3029040" y="4767120"/>
-            <a:ext cx="3085560" cy="273240"/>
-          </a:xfrm>
-          <a:prstGeom prst="rect">
-            <a:avLst/>
-          </a:prstGeom>
-          <a:noFill/>
-          <a:ln w="0">
-            <a:noFill/>
-          </a:ln>
-        </p:spPr>
-        <p:txBody>
-          <a:bodyPr lIns="90000" rIns="90000" tIns="45000" bIns="45000" anchor="ctr">
-            <a:noAutofit/>
-          </a:bodyPr>
-          <a:lstStyle>
-            <a:lvl1pPr algn="ctr">
-              <a:lnSpc>
-                <a:spcPct val="100000"/>
-              </a:lnSpc>
-              <a:buNone/>
-              <a:defRPr b="0" lang="en-US" sz="1400" spc="-1" strike="noStrike">
-                <a:latin typeface="Times New Roman"/>
-              </a:defRPr>
-            </a:lvl1pPr>
-          </a:lstStyle>
-          <a:p>
-            <a:pPr algn="ctr">
-              <a:lnSpc>
-                <a:spcPct val="100000"/>
-              </a:lnSpc>
-              <a:buNone/>
-            </a:pPr>
-            <a:r>
-              <a:rPr b="0" lang="en-US" sz="1400" spc="-1" strike="noStrike">
-                <a:latin typeface="Times New Roman"/>
-              </a:rPr>
-              <a:t>&lt;нижний колонтитул&gt;</a:t>
-            </a:r>
-            <a:endParaRPr b="0" lang="ru-RU" sz="1400" spc="-1" strike="noStrike">
-              <a:latin typeface="Times New Roman"/>
-            </a:endParaRPr>
-          </a:p>
-        </p:txBody>
-      </p:sp>
-      <p:sp>
-        <p:nvSpPr>
-          <p:cNvPr id="2" name="PlaceHolder 3"/>
-          <p:cNvSpPr>
-            <a:spLocks noGrp="1"/>
-          </p:cNvSpPr>
-          <p:nvPr>
-            <p:ph type="sldNum" idx="2"/>
-          </p:nvPr>
-        </p:nvSpPr>
-        <p:spPr>
-          <a:xfrm>
-            <a:off x="6458040" y="4767120"/>
-            <a:ext cx="2056680" cy="273240"/>
-          </a:xfrm>
-          <a:prstGeom prst="rect">
-            <a:avLst/>
-          </a:prstGeom>
-          <a:noFill/>
-          <a:ln w="0">
-            <a:noFill/>
-          </a:ln>
-        </p:spPr>
-        <p:txBody>
-          <a:bodyPr lIns="90000" rIns="90000" tIns="45000" bIns="45000" anchor="ctr">
-            <a:noAutofit/>
-          </a:bodyPr>
-          <a:lstStyle>
-            <a:lvl1pPr algn="r">
-              <a:lnSpc>
-                <a:spcPct val="100000"/>
-              </a:lnSpc>
-              <a:buNone/>
-              <a:defRPr b="0" lang="en-US" sz="900" spc="-1" strike="noStrike">
-                <a:solidFill>
-                  <a:srgbClr val="8b8b8b"/>
-                </a:solidFill>
-                <a:latin typeface="Calibri"/>
-              </a:defRPr>
-            </a:lvl1pPr>
-          </a:lstStyle>
-          <a:p>
-            <a:pPr algn="r">
-              <a:lnSpc>
-                <a:spcPct val="100000"/>
-              </a:lnSpc>
-              <a:buNone/>
-            </a:pPr>
-            <a:fld id="{92819B7D-6C8A-4586-94FB-CB285743814C}" type="slidenum">
-              <a:rPr b="0" lang="en-US" sz="900" spc="-1" strike="noStrike">
-                <a:solidFill>
-                  <a:srgbClr val="8b8b8b"/>
-                </a:solidFill>
-                <a:latin typeface="Calibri"/>
-              </a:rPr>
-              <a:t>&lt;номер&gt;</a:t>
-            </a:fld>
-            <a:endParaRPr b="0" lang="ru-RU" sz="900" spc="-1" strike="noStrike">
-              <a:latin typeface="Times New Roman"/>
-            </a:endParaRPr>
-          </a:p>
-        </p:txBody>
-      </p:sp>
-      <p:sp>
-        <p:nvSpPr>
-          <p:cNvPr id="3" name="PlaceHolder 4"/>
-          <p:cNvSpPr>
-            <a:spLocks noGrp="1"/>
-          </p:cNvSpPr>
-          <p:nvPr>
-            <p:ph type="dt" idx="3"/>
-          </p:nvPr>
-        </p:nvSpPr>
-        <p:spPr>
-          <a:xfrm>
-            <a:off x="628560" y="4767120"/>
-            <a:ext cx="2056680" cy="273240"/>
-          </a:xfrm>
-          <a:prstGeom prst="rect">
-            <a:avLst/>
-          </a:prstGeom>
-          <a:noFill/>
-          <a:ln w="0">
-            <a:noFill/>
-          </a:ln>
-        </p:spPr>
-        <p:txBody>
-          <a:bodyPr lIns="90000" rIns="90000" tIns="45000" bIns="45000" anchor="ctr">
-            <a:noAutofit/>
-          </a:bodyPr>
-          <a:lstStyle>
-            <a:lvl1pPr>
-              <a:defRPr b="0" lang="ru-RU" sz="1400" spc="-1" strike="noStrike">
-                <a:latin typeface="Times New Roman"/>
-              </a:defRPr>
-            </a:lvl1pPr>
-          </a:lstStyle>
-          <a:p>
-            <a:r>
-              <a:rPr b="0" lang="ru-RU" sz="1400" spc="-1" strike="noStrike">
-                <a:latin typeface="Times New Roman"/>
-              </a:rPr>
-              <a:t>&lt;дата/время&gt;</a:t>
-            </a:r>
-            <a:endParaRPr b="0" lang="ru-RU" sz="1400" spc="-1" strike="noStrike">
-              <a:latin typeface="Times New Roman"/>
-            </a:endParaRPr>
-          </a:p>
-        </p:txBody>
-      </p:sp>
-      <p:sp>
-        <p:nvSpPr>
-          <p:cNvPr id="4" name="PlaceHolder 5"/>
           <p:cNvSpPr>
             <a:spLocks noGrp="1"/>
           </p:cNvSpPr>
@@ -3501,7 +3334,7 @@
         <p:spPr>
           <a:xfrm>
             <a:off x="457200" y="1203480"/>
-            <a:ext cx="8229240" cy="2982960"/>
+            <a:ext cx="8228880" cy="2982600"/>
           </a:xfrm>
           <a:prstGeom prst="rect">
             <a:avLst/>
@@ -3528,12 +3361,12 @@
               <a:buChar char=""/>
             </a:pPr>
             <a:r>
-              <a:rPr b="0" lang="ru-RU" sz="3200" spc="-1" strike="noStrike">
-                <a:latin typeface="Arial"/>
-              </a:rPr>
-              <a:t>Для правки структуры щёлкните мышью</a:t>
-            </a:r>
-            <a:endParaRPr b="0" lang="ru-RU" sz="3200" spc="-1" strike="noStrike">
+              <a:rPr b="0" lang="en-US" sz="1800" spc="-1" strike="noStrike">
+                <a:latin typeface="Arial"/>
+              </a:rPr>
+              <a:t>Click to edit the outline text format</a:t>
+            </a:r>
+            <a:endParaRPr b="0" lang="en-US" sz="1800" spc="-1" strike="noStrike">
               <a:latin typeface="Arial"/>
             </a:endParaRPr>
           </a:p>
@@ -3550,12 +3383,12 @@
               <a:buChar char=""/>
             </a:pPr>
             <a:r>
-              <a:rPr b="0" lang="ru-RU" sz="2800" spc="-1" strike="noStrike">
-                <a:latin typeface="Arial"/>
-              </a:rPr>
-              <a:t>Второй уровень структуры</a:t>
-            </a:r>
-            <a:endParaRPr b="0" lang="ru-RU" sz="2800" spc="-1" strike="noStrike">
+              <a:rPr b="0" lang="en-US" sz="1800" spc="-1" strike="noStrike">
+                <a:latin typeface="Arial"/>
+              </a:rPr>
+              <a:t>Second Outline Level</a:t>
+            </a:r>
+            <a:endParaRPr b="0" lang="en-US" sz="1800" spc="-1" strike="noStrike">
               <a:latin typeface="Arial"/>
             </a:endParaRPr>
           </a:p>
@@ -3572,12 +3405,12 @@
               <a:buChar char=""/>
             </a:pPr>
             <a:r>
-              <a:rPr b="0" lang="ru-RU" sz="2400" spc="-1" strike="noStrike">
-                <a:latin typeface="Arial"/>
-              </a:rPr>
-              <a:t>Третий уровень структуры</a:t>
-            </a:r>
-            <a:endParaRPr b="0" lang="ru-RU" sz="2400" spc="-1" strike="noStrike">
+              <a:rPr b="0" lang="en-US" sz="1800" spc="-1" strike="noStrike">
+                <a:latin typeface="Arial"/>
+              </a:rPr>
+              <a:t>Third Outline Level</a:t>
+            </a:r>
+            <a:endParaRPr b="0" lang="en-US" sz="1800" spc="-1" strike="noStrike">
               <a:latin typeface="Arial"/>
             </a:endParaRPr>
           </a:p>
@@ -3594,12 +3427,12 @@
               <a:buChar char=""/>
             </a:pPr>
             <a:r>
-              <a:rPr b="0" lang="ru-RU" sz="2000" spc="-1" strike="noStrike">
-                <a:latin typeface="Arial"/>
-              </a:rPr>
-              <a:t>Четвёртый уровень структуры</a:t>
-            </a:r>
-            <a:endParaRPr b="0" lang="ru-RU" sz="2000" spc="-1" strike="noStrike">
+              <a:rPr b="0" lang="en-US" sz="1800" spc="-1" strike="noStrike">
+                <a:latin typeface="Arial"/>
+              </a:rPr>
+              <a:t>Fourth Outline Level</a:t>
+            </a:r>
+            <a:endParaRPr b="0" lang="en-US" sz="1800" spc="-1" strike="noStrike">
               <a:latin typeface="Arial"/>
             </a:endParaRPr>
           </a:p>
@@ -3616,12 +3449,12 @@
               <a:buChar char=""/>
             </a:pPr>
             <a:r>
-              <a:rPr b="0" lang="ru-RU" sz="2000" spc="-1" strike="noStrike">
-                <a:latin typeface="Arial"/>
-              </a:rPr>
-              <a:t>Пятый уровень структуры</a:t>
-            </a:r>
-            <a:endParaRPr b="0" lang="ru-RU" sz="2000" spc="-1" strike="noStrike">
+              <a:rPr b="0" lang="en-US" sz="1800" spc="-1" strike="noStrike">
+                <a:latin typeface="Arial"/>
+              </a:rPr>
+              <a:t>Fifth Outline Level</a:t>
+            </a:r>
+            <a:endParaRPr b="0" lang="en-US" sz="1800" spc="-1" strike="noStrike">
               <a:latin typeface="Arial"/>
             </a:endParaRPr>
           </a:p>
@@ -3638,12 +3471,12 @@
               <a:buChar char=""/>
             </a:pPr>
             <a:r>
-              <a:rPr b="0" lang="ru-RU" sz="2000" spc="-1" strike="noStrike">
-                <a:latin typeface="Arial"/>
-              </a:rPr>
-              <a:t>Шестой уровень структуры</a:t>
-            </a:r>
-            <a:endParaRPr b="0" lang="ru-RU" sz="2000" spc="-1" strike="noStrike">
+              <a:rPr b="0" lang="en-US" sz="1800" spc="-1" strike="noStrike">
+                <a:latin typeface="Arial"/>
+              </a:rPr>
+              <a:t>Sixth Outline Level</a:t>
+            </a:r>
+            <a:endParaRPr b="0" lang="en-US" sz="1800" spc="-1" strike="noStrike">
               <a:latin typeface="Arial"/>
             </a:endParaRPr>
           </a:p>
@@ -3660,13 +3493,180 @@
               <a:buChar char=""/>
             </a:pPr>
             <a:r>
-              <a:rPr b="0" lang="ru-RU" sz="2000" spc="-1" strike="noStrike">
-                <a:latin typeface="Arial"/>
-              </a:rPr>
-              <a:t>Седьмой уровень структуры</a:t>
-            </a:r>
-            <a:endParaRPr b="0" lang="ru-RU" sz="2000" spc="-1" strike="noStrike">
-              <a:latin typeface="Arial"/>
+              <a:rPr b="0" lang="en-US" sz="1800" spc="-1" strike="noStrike">
+                <a:latin typeface="Arial"/>
+              </a:rPr>
+              <a:t>Seventh Outline Level</a:t>
+            </a:r>
+            <a:endParaRPr b="0" lang="en-US" sz="1800" spc="-1" strike="noStrike">
+              <a:latin typeface="Arial"/>
+            </a:endParaRPr>
+          </a:p>
+        </p:txBody>
+      </p:sp>
+      <p:sp>
+        <p:nvSpPr>
+          <p:cNvPr id="2" name="PlaceHolder 3"/>
+          <p:cNvSpPr>
+            <a:spLocks noGrp="1"/>
+          </p:cNvSpPr>
+          <p:nvPr>
+            <p:ph type="ftr" idx="1"/>
+          </p:nvPr>
+        </p:nvSpPr>
+        <p:spPr>
+          <a:xfrm>
+            <a:off x="3029040" y="4767120"/>
+            <a:ext cx="3085200" cy="272880"/>
+          </a:xfrm>
+          <a:prstGeom prst="rect">
+            <a:avLst/>
+          </a:prstGeom>
+          <a:noFill/>
+          <a:ln w="0">
+            <a:noFill/>
+          </a:ln>
+        </p:spPr>
+        <p:txBody>
+          <a:bodyPr lIns="90000" rIns="90000" tIns="45000" bIns="45000" anchor="ctr">
+            <a:noAutofit/>
+          </a:bodyPr>
+          <a:lstStyle>
+            <a:lvl1pPr algn="ctr">
+              <a:lnSpc>
+                <a:spcPct val="100000"/>
+              </a:lnSpc>
+              <a:buNone/>
+              <a:defRPr b="0" lang="en-US" sz="1400" spc="-1" strike="noStrike">
+                <a:latin typeface="Times New Roman"/>
+              </a:defRPr>
+            </a:lvl1pPr>
+          </a:lstStyle>
+          <a:p>
+            <a:pPr algn="ctr">
+              <a:lnSpc>
+                <a:spcPct val="100000"/>
+              </a:lnSpc>
+              <a:buNone/>
+            </a:pPr>
+            <a:r>
+              <a:rPr b="0" lang="en-US" sz="1400" spc="-1" strike="noStrike">
+                <a:latin typeface="Times New Roman"/>
+              </a:rPr>
+              <a:t>&lt;footer&gt;</a:t>
+            </a:r>
+            <a:endParaRPr b="0" lang="en-US" sz="1400" spc="-1" strike="noStrike">
+              <a:latin typeface="Times New Roman"/>
+            </a:endParaRPr>
+          </a:p>
+        </p:txBody>
+      </p:sp>
+      <p:sp>
+        <p:nvSpPr>
+          <p:cNvPr id="3" name="PlaceHolder 4"/>
+          <p:cNvSpPr>
+            <a:spLocks noGrp="1"/>
+          </p:cNvSpPr>
+          <p:nvPr>
+            <p:ph type="sldNum" idx="2"/>
+          </p:nvPr>
+        </p:nvSpPr>
+        <p:spPr>
+          <a:xfrm>
+            <a:off x="6458040" y="4767120"/>
+            <a:ext cx="2056320" cy="272880"/>
+          </a:xfrm>
+          <a:prstGeom prst="rect">
+            <a:avLst/>
+          </a:prstGeom>
+          <a:noFill/>
+          <a:ln w="0">
+            <a:noFill/>
+          </a:ln>
+        </p:spPr>
+        <p:txBody>
+          <a:bodyPr lIns="90000" rIns="90000" tIns="45000" bIns="45000" anchor="ctr">
+            <a:noAutofit/>
+          </a:bodyPr>
+          <a:lstStyle>
+            <a:lvl1pPr algn="r">
+              <a:lnSpc>
+                <a:spcPct val="100000"/>
+              </a:lnSpc>
+              <a:buNone/>
+              <a:defRPr b="0" lang="en-US" sz="900" spc="-1" strike="noStrike">
+                <a:solidFill>
+                  <a:srgbClr val="8b8b8b"/>
+                </a:solidFill>
+                <a:latin typeface="Calibri"/>
+              </a:defRPr>
+            </a:lvl1pPr>
+          </a:lstStyle>
+          <a:p>
+            <a:pPr algn="r">
+              <a:lnSpc>
+                <a:spcPct val="100000"/>
+              </a:lnSpc>
+              <a:buNone/>
+            </a:pPr>
+            <a:fld id="{742E1578-F21D-49BD-A23D-E2C90A4C3EDD}" type="slidenum">
+              <a:rPr b="0" lang="en-US" sz="900" spc="-1" strike="noStrike">
+                <a:solidFill>
+                  <a:srgbClr val="8b8b8b"/>
+                </a:solidFill>
+                <a:latin typeface="Calibri"/>
+              </a:rPr>
+              <a:t>&lt;number&gt;</a:t>
+            </a:fld>
+            <a:endParaRPr b="0" lang="en-US" sz="900" spc="-1" strike="noStrike">
+              <a:latin typeface="Times New Roman"/>
+            </a:endParaRPr>
+          </a:p>
+        </p:txBody>
+      </p:sp>
+      <p:sp>
+        <p:nvSpPr>
+          <p:cNvPr id="4" name="PlaceHolder 5"/>
+          <p:cNvSpPr>
+            <a:spLocks noGrp="1"/>
+          </p:cNvSpPr>
+          <p:nvPr>
+            <p:ph type="dt" idx="3"/>
+          </p:nvPr>
+        </p:nvSpPr>
+        <p:spPr>
+          <a:xfrm>
+            <a:off x="628560" y="4767120"/>
+            <a:ext cx="2056320" cy="272880"/>
+          </a:xfrm>
+          <a:prstGeom prst="rect">
+            <a:avLst/>
+          </a:prstGeom>
+          <a:noFill/>
+          <a:ln w="0">
+            <a:noFill/>
+          </a:ln>
+        </p:spPr>
+        <p:txBody>
+          <a:bodyPr lIns="90000" rIns="90000" tIns="45000" bIns="45000" anchor="ctr">
+            <a:noAutofit/>
+          </a:bodyPr>
+          <a:lstStyle>
+            <a:lvl1pPr>
+              <a:defRPr b="0" lang="en-US" sz="1400" spc="-1" strike="noStrike">
+                <a:latin typeface="Times New Roman"/>
+              </a:defRPr>
+            </a:lvl1pPr>
+          </a:lstStyle>
+          <a:p>
+            <a:r>
+              <a:rPr b="0" lang="en-US" sz="1400" spc="-1" strike="noStrike">
+                <a:latin typeface="Times New Roman"/>
+              </a:rPr>
+              <a:t>&lt;date/time&gt;</a:t>
+            </a:r>
+            <a:endParaRPr b="0" lang="en-US" sz="1400" spc="-1" strike="noStrike">
+              <a:latin typeface="Times New Roman"/>
             </a:endParaRPr>
           </a:p>
         </p:txBody>
@@ -3724,7 +3724,7 @@
         <p:spPr>
           <a:xfrm>
             <a:off x="186840" y="185400"/>
-            <a:ext cx="8769960" cy="4757760"/>
+            <a:ext cx="8769600" cy="4757400"/>
           </a:xfrm>
           <a:prstGeom prst="roundRect">
             <a:avLst>
@@ -3762,7 +3762,7 @@
         <p:spPr>
           <a:xfrm>
             <a:off x="460080" y="658080"/>
-            <a:ext cx="8468640" cy="3306600"/>
+            <a:ext cx="8468280" cy="3306240"/>
           </a:xfrm>
           <a:prstGeom prst="rect">
             <a:avLst/>
@@ -3799,59 +3799,7 @@
               </a:rPr>
               <a:t>TITLE</a:t>
             </a:r>
-            <a:endParaRPr b="0" lang="ru-RU" sz="5400" spc="-1" strike="noStrike">
-              <a:latin typeface="Arial"/>
-            </a:endParaRPr>
-          </a:p>
-        </p:txBody>
-      </p:sp>
-      <p:sp>
-        <p:nvSpPr>
-          <p:cNvPr id="49" name="Прямоугольник 5"/>
-          <p:cNvSpPr/>
-          <p:nvPr/>
-        </p:nvSpPr>
-        <p:spPr>
-          <a:xfrm>
-            <a:off x="460080" y="358920"/>
-            <a:ext cx="2998800" cy="269280"/>
-          </a:xfrm>
-          <a:prstGeom prst="rect">
-            <a:avLst/>
-          </a:prstGeom>
-          <a:noFill/>
-          <a:ln w="0">
-            <a:noFill/>
-          </a:ln>
-        </p:spPr>
-        <p:style>
-          <a:lnRef idx="0"/>
-          <a:fillRef idx="0"/>
-          <a:effectRef idx="0"/>
-          <a:fontRef idx="minor"/>
-        </p:style>
-        <p:txBody>
-          <a:bodyPr lIns="90000" rIns="90000" tIns="45000" bIns="45000" anchor="t">
-            <a:noAutofit/>
-          </a:bodyPr>
-          <a:p>
-            <a:pPr>
-              <a:lnSpc>
-                <a:spcPts val="1650"/>
-              </a:lnSpc>
-              <a:buNone/>
-            </a:pPr>
-            <a:r>
-              <a:rPr b="0" lang="ru-RU" sz="1400" spc="-1" strike="noStrike">
-                <a:solidFill>
-                  <a:srgbClr val="f2f2f2"/>
-                </a:solidFill>
-                <a:latin typeface="Arial"/>
-                <a:ea typeface="DejaVu Sans"/>
-              </a:rPr>
-              <a:t>Тема:</a:t>
-            </a:r>
-            <a:endParaRPr b="0" lang="ru-RU" sz="1400" spc="-1" strike="noStrike">
+            <a:endParaRPr b="0" lang="en-US" sz="5400" spc="-1" strike="noStrike">
               <a:latin typeface="Arial"/>
             </a:endParaRPr>
           </a:p>
@@ -3896,14 +3844,14 @@
       </p:grpSpPr>
       <p:sp>
         <p:nvSpPr>
-          <p:cNvPr id="147" name="Прямоугольник со скругленными углами 3"/>
+          <p:cNvPr id="146" name="Прямоугольник со скругленными углами 3"/>
           <p:cNvSpPr/>
           <p:nvPr/>
         </p:nvSpPr>
         <p:spPr>
           <a:xfrm>
             <a:off x="0" y="0"/>
-            <a:ext cx="9143280" cy="1961280"/>
+            <a:ext cx="9142920" cy="1960920"/>
           </a:xfrm>
           <a:prstGeom prst="roundRect">
             <a:avLst>
@@ -3954,22 +3902,22 @@
               </a:rPr>
               <a:t>PIC</a:t>
             </a:r>
-            <a:endParaRPr b="0" lang="ru-RU" sz="1800" spc="-1" strike="noStrike">
-              <a:latin typeface="Arial"/>
-            </a:endParaRPr>
-          </a:p>
-        </p:txBody>
-      </p:sp>
-      <p:sp>
-        <p:nvSpPr>
-          <p:cNvPr id="148" name="TextBox 10"/>
+            <a:endParaRPr b="0" lang="en-US" sz="1800" spc="-1" strike="noStrike">
+              <a:latin typeface="Arial"/>
+            </a:endParaRPr>
+          </a:p>
+        </p:txBody>
+      </p:sp>
+      <p:sp>
+        <p:nvSpPr>
+          <p:cNvPr id="147" name="TextBox 10"/>
           <p:cNvSpPr/>
           <p:nvPr/>
         </p:nvSpPr>
         <p:spPr>
           <a:xfrm>
             <a:off x="384840" y="2571840"/>
-            <a:ext cx="2664720" cy="713520"/>
+            <a:ext cx="2664360" cy="713160"/>
           </a:xfrm>
           <a:prstGeom prst="rect">
             <a:avLst/>
@@ -4006,22 +3954,22 @@
               </a:rPr>
               <a:t>SUBTITLE1</a:t>
             </a:r>
-            <a:endParaRPr b="0" lang="ru-RU" sz="1400" spc="-1" strike="noStrike">
-              <a:latin typeface="Arial"/>
-            </a:endParaRPr>
-          </a:p>
-        </p:txBody>
-      </p:sp>
-      <p:sp>
-        <p:nvSpPr>
-          <p:cNvPr id="149" name="TextBox 10"/>
+            <a:endParaRPr b="0" lang="en-US" sz="1400" spc="-1" strike="noStrike">
+              <a:latin typeface="Arial"/>
+            </a:endParaRPr>
+          </a:p>
+        </p:txBody>
+      </p:sp>
+      <p:sp>
+        <p:nvSpPr>
+          <p:cNvPr id="148" name="TextBox 10"/>
           <p:cNvSpPr/>
           <p:nvPr/>
         </p:nvSpPr>
         <p:spPr>
           <a:xfrm>
             <a:off x="384840" y="3456360"/>
-            <a:ext cx="2664720" cy="1564920"/>
+            <a:ext cx="2664360" cy="1564560"/>
           </a:xfrm>
           <a:prstGeom prst="rect">
             <a:avLst/>
@@ -4068,22 +4016,22 @@
               </a:rPr>
               <a:t>1</a:t>
             </a:r>
-            <a:endParaRPr b="0" lang="ru-RU" sz="1100" spc="-1" strike="noStrike">
-              <a:latin typeface="Arial"/>
-            </a:endParaRPr>
-          </a:p>
-        </p:txBody>
-      </p:sp>
-      <p:sp>
-        <p:nvSpPr>
-          <p:cNvPr id="150" name="TextBox 10"/>
+            <a:endParaRPr b="0" lang="en-US" sz="1100" spc="-1" strike="noStrike">
+              <a:latin typeface="Arial"/>
+            </a:endParaRPr>
+          </a:p>
+        </p:txBody>
+      </p:sp>
+      <p:sp>
+        <p:nvSpPr>
+          <p:cNvPr id="149" name="TextBox 10"/>
           <p:cNvSpPr/>
           <p:nvPr/>
         </p:nvSpPr>
         <p:spPr>
           <a:xfrm>
             <a:off x="3239280" y="2571840"/>
-            <a:ext cx="2664720" cy="713520"/>
+            <a:ext cx="2664360" cy="713160"/>
           </a:xfrm>
           <a:prstGeom prst="rect">
             <a:avLst/>
@@ -4120,22 +4068,22 @@
               </a:rPr>
               <a:t>SUBTITLE2</a:t>
             </a:r>
-            <a:endParaRPr b="0" lang="ru-RU" sz="1400" spc="-1" strike="noStrike">
-              <a:latin typeface="Arial"/>
-            </a:endParaRPr>
-          </a:p>
-        </p:txBody>
-      </p:sp>
-      <p:sp>
-        <p:nvSpPr>
-          <p:cNvPr id="151" name="TextBox 10"/>
+            <a:endParaRPr b="0" lang="en-US" sz="1400" spc="-1" strike="noStrike">
+              <a:latin typeface="Arial"/>
+            </a:endParaRPr>
+          </a:p>
+        </p:txBody>
+      </p:sp>
+      <p:sp>
+        <p:nvSpPr>
+          <p:cNvPr id="150" name="TextBox 10"/>
           <p:cNvSpPr/>
           <p:nvPr/>
         </p:nvSpPr>
         <p:spPr>
           <a:xfrm>
             <a:off x="3239280" y="3456360"/>
-            <a:ext cx="2664720" cy="1564920"/>
+            <a:ext cx="2664360" cy="1564560"/>
           </a:xfrm>
           <a:prstGeom prst="rect">
             <a:avLst/>
@@ -4182,22 +4130,22 @@
               </a:rPr>
               <a:t>2</a:t>
             </a:r>
-            <a:endParaRPr b="0" lang="ru-RU" sz="1100" spc="-1" strike="noStrike">
-              <a:latin typeface="Arial"/>
-            </a:endParaRPr>
-          </a:p>
-        </p:txBody>
-      </p:sp>
-      <p:sp>
-        <p:nvSpPr>
-          <p:cNvPr id="152" name="TextBox 10"/>
+            <a:endParaRPr b="0" lang="en-US" sz="1100" spc="-1" strike="noStrike">
+              <a:latin typeface="Arial"/>
+            </a:endParaRPr>
+          </a:p>
+        </p:txBody>
+      </p:sp>
+      <p:sp>
+        <p:nvSpPr>
+          <p:cNvPr id="151" name="TextBox 10"/>
           <p:cNvSpPr/>
           <p:nvPr/>
         </p:nvSpPr>
         <p:spPr>
           <a:xfrm>
             <a:off x="6093720" y="2571840"/>
-            <a:ext cx="2664720" cy="713520"/>
+            <a:ext cx="2664360" cy="713160"/>
           </a:xfrm>
           <a:prstGeom prst="rect">
             <a:avLst/>
@@ -4234,22 +4182,22 @@
               </a:rPr>
               <a:t>SUBTITLE3</a:t>
             </a:r>
-            <a:endParaRPr b="0" lang="ru-RU" sz="1400" spc="-1" strike="noStrike">
-              <a:latin typeface="Arial"/>
-            </a:endParaRPr>
-          </a:p>
-        </p:txBody>
-      </p:sp>
-      <p:sp>
-        <p:nvSpPr>
-          <p:cNvPr id="153" name="TextBox 10"/>
+            <a:endParaRPr b="0" lang="en-US" sz="1400" spc="-1" strike="noStrike">
+              <a:latin typeface="Arial"/>
+            </a:endParaRPr>
+          </a:p>
+        </p:txBody>
+      </p:sp>
+      <p:sp>
+        <p:nvSpPr>
+          <p:cNvPr id="152" name="TextBox 10"/>
           <p:cNvSpPr/>
           <p:nvPr/>
         </p:nvSpPr>
         <p:spPr>
           <a:xfrm>
             <a:off x="6093720" y="3456360"/>
-            <a:ext cx="2664720" cy="1564920"/>
+            <a:ext cx="2664360" cy="1564560"/>
           </a:xfrm>
           <a:prstGeom prst="rect">
             <a:avLst/>
@@ -4296,15 +4244,15 @@
               </a:rPr>
               <a:t>3</a:t>
             </a:r>
-            <a:endParaRPr b="0" lang="ru-RU" sz="1100" spc="-1" strike="noStrike">
-              <a:latin typeface="Arial"/>
-            </a:endParaRPr>
-          </a:p>
-        </p:txBody>
-      </p:sp>
-      <p:sp>
-        <p:nvSpPr>
-          <p:cNvPr id="154" name="Прямая соединительная линия 2"/>
+            <a:endParaRPr b="0" lang="en-US" sz="1100" spc="-1" strike="noStrike">
+              <a:latin typeface="Arial"/>
+            </a:endParaRPr>
+          </a:p>
+        </p:txBody>
+      </p:sp>
+      <p:sp>
+        <p:nvSpPr>
+          <p:cNvPr id="153" name="Прямая соединительная линия 2"/>
           <p:cNvSpPr/>
           <p:nvPr/>
         </p:nvSpPr>
@@ -4337,7 +4285,7 @@
       </p:sp>
       <p:sp>
         <p:nvSpPr>
-          <p:cNvPr id="155" name="Прямая соединительная линия 11"/>
+          <p:cNvPr id="154" name="Прямая соединительная линия 11"/>
           <p:cNvSpPr/>
           <p:nvPr/>
         </p:nvSpPr>
@@ -4370,7 +4318,7 @@
       </p:sp>
       <p:sp>
         <p:nvSpPr>
-          <p:cNvPr id="156" name="Прямая соединительная линия 30"/>
+          <p:cNvPr id="155" name="Прямая соединительная линия 30"/>
           <p:cNvSpPr/>
           <p:nvPr/>
         </p:nvSpPr>
@@ -4403,14 +4351,14 @@
       </p:sp>
       <p:sp>
         <p:nvSpPr>
-          <p:cNvPr id="157" name="TextBox 12"/>
+          <p:cNvPr id="156" name="TextBox 12"/>
           <p:cNvSpPr/>
           <p:nvPr/>
         </p:nvSpPr>
         <p:spPr>
           <a:xfrm>
             <a:off x="384840" y="2178000"/>
-            <a:ext cx="8465400" cy="480600"/>
+            <a:ext cx="8465040" cy="480240"/>
           </a:xfrm>
           <a:prstGeom prst="rect">
             <a:avLst/>
@@ -4447,7 +4395,7 @@
               </a:rPr>
               <a:t>TITLE</a:t>
             </a:r>
-            <a:endParaRPr b="0" lang="ru-RU" sz="2200" spc="-1" strike="noStrike">
+            <a:endParaRPr b="0" lang="en-US" sz="2200" spc="-1" strike="noStrike">
               <a:latin typeface="Arial"/>
             </a:endParaRPr>
           </a:p>
@@ -4492,14 +4440,14 @@
       </p:grpSpPr>
       <p:sp>
         <p:nvSpPr>
-          <p:cNvPr id="158" name="TextBox 20"/>
+          <p:cNvPr id="157" name="TextBox 20"/>
           <p:cNvSpPr/>
           <p:nvPr/>
         </p:nvSpPr>
         <p:spPr>
           <a:xfrm>
             <a:off x="516960" y="411840"/>
-            <a:ext cx="8397720" cy="575640"/>
+            <a:ext cx="8397360" cy="575280"/>
           </a:xfrm>
           <a:prstGeom prst="rect">
             <a:avLst/>
@@ -4536,22 +4484,22 @@
               </a:rPr>
               <a:t>TITLE</a:t>
             </a:r>
-            <a:endParaRPr b="0" lang="ru-RU" sz="2200" spc="-1" strike="noStrike">
-              <a:latin typeface="Arial"/>
-            </a:endParaRPr>
-          </a:p>
-        </p:txBody>
-      </p:sp>
-      <p:sp>
-        <p:nvSpPr>
-          <p:cNvPr id="159" name="TextBox 10"/>
+            <a:endParaRPr b="0" lang="en-US" sz="2200" spc="-1" strike="noStrike">
+              <a:latin typeface="Arial"/>
+            </a:endParaRPr>
+          </a:p>
+        </p:txBody>
+      </p:sp>
+      <p:sp>
+        <p:nvSpPr>
+          <p:cNvPr id="158" name="TextBox 10"/>
           <p:cNvSpPr/>
           <p:nvPr/>
         </p:nvSpPr>
         <p:spPr>
           <a:xfrm>
             <a:off x="516960" y="1058040"/>
-            <a:ext cx="5303880" cy="575640"/>
+            <a:ext cx="5303520" cy="575280"/>
           </a:xfrm>
           <a:prstGeom prst="rect">
             <a:avLst/>
@@ -4588,22 +4536,22 @@
               </a:rPr>
               <a:t>SUBTITLE1</a:t>
             </a:r>
-            <a:endParaRPr b="0" lang="ru-RU" sz="1400" spc="-1" strike="noStrike">
-              <a:latin typeface="Arial"/>
-            </a:endParaRPr>
-          </a:p>
-        </p:txBody>
-      </p:sp>
-      <p:sp>
-        <p:nvSpPr>
-          <p:cNvPr id="160" name="TextBox 10"/>
+            <a:endParaRPr b="0" lang="en-US" sz="1400" spc="-1" strike="noStrike">
+              <a:latin typeface="Arial"/>
+            </a:endParaRPr>
+          </a:p>
+        </p:txBody>
+      </p:sp>
+      <p:sp>
+        <p:nvSpPr>
+          <p:cNvPr id="159" name="TextBox 10"/>
           <p:cNvSpPr/>
           <p:nvPr/>
         </p:nvSpPr>
         <p:spPr>
           <a:xfrm>
             <a:off x="516960" y="1704600"/>
-            <a:ext cx="5303880" cy="713520"/>
+            <a:ext cx="5303520" cy="713160"/>
           </a:xfrm>
           <a:prstGeom prst="rect">
             <a:avLst/>
@@ -4650,22 +4598,22 @@
               </a:rPr>
               <a:t>1</a:t>
             </a:r>
-            <a:endParaRPr b="0" lang="ru-RU" sz="1100" spc="-1" strike="noStrike">
-              <a:latin typeface="Arial"/>
-            </a:endParaRPr>
-          </a:p>
-        </p:txBody>
-      </p:sp>
-      <p:sp>
-        <p:nvSpPr>
-          <p:cNvPr id="161" name="Прямоугольник со скругленными углами 3"/>
+            <a:endParaRPr b="0" lang="en-US" sz="1100" spc="-1" strike="noStrike">
+              <a:latin typeface="Arial"/>
+            </a:endParaRPr>
+          </a:p>
+        </p:txBody>
+      </p:sp>
+      <p:sp>
+        <p:nvSpPr>
+          <p:cNvPr id="160" name="Прямоугольник со скругленными углами 3"/>
           <p:cNvSpPr/>
           <p:nvPr/>
         </p:nvSpPr>
         <p:spPr>
           <a:xfrm>
             <a:off x="6000480" y="1058400"/>
-            <a:ext cx="2914200" cy="1824120"/>
+            <a:ext cx="2913840" cy="1823760"/>
           </a:xfrm>
           <a:prstGeom prst="roundRect">
             <a:avLst>
@@ -4716,22 +4664,22 @@
               </a:rPr>
               <a:t>PIC</a:t>
             </a:r>
-            <a:endParaRPr b="0" lang="ru-RU" sz="1800" spc="-1" strike="noStrike">
-              <a:latin typeface="Arial"/>
-            </a:endParaRPr>
-          </a:p>
-        </p:txBody>
-      </p:sp>
-      <p:sp>
-        <p:nvSpPr>
-          <p:cNvPr id="162" name="Прямоугольник со скругленными углами 3"/>
+            <a:endParaRPr b="0" lang="en-US" sz="1800" spc="-1" strike="noStrike">
+              <a:latin typeface="Arial"/>
+            </a:endParaRPr>
+          </a:p>
+        </p:txBody>
+      </p:sp>
+      <p:sp>
+        <p:nvSpPr>
+          <p:cNvPr id="161" name="Прямоугольник со скругленными углами 3"/>
           <p:cNvSpPr/>
           <p:nvPr/>
         </p:nvSpPr>
         <p:spPr>
           <a:xfrm>
             <a:off x="6000480" y="3082320"/>
-            <a:ext cx="2914200" cy="1824120"/>
+            <a:ext cx="2913840" cy="1823760"/>
           </a:xfrm>
           <a:prstGeom prst="roundRect">
             <a:avLst>
@@ -4782,22 +4730,22 @@
               </a:rPr>
               <a:t>PIC</a:t>
             </a:r>
-            <a:endParaRPr b="0" lang="ru-RU" sz="1800" spc="-1" strike="noStrike">
-              <a:latin typeface="Arial"/>
-            </a:endParaRPr>
-          </a:p>
-        </p:txBody>
-      </p:sp>
-      <p:sp>
-        <p:nvSpPr>
-          <p:cNvPr id="163" name="TextBox 10"/>
+            <a:endParaRPr b="0" lang="en-US" sz="1800" spc="-1" strike="noStrike">
+              <a:latin typeface="Arial"/>
+            </a:endParaRPr>
+          </a:p>
+        </p:txBody>
+      </p:sp>
+      <p:sp>
+        <p:nvSpPr>
+          <p:cNvPr id="162" name="TextBox 10"/>
           <p:cNvSpPr/>
           <p:nvPr/>
         </p:nvSpPr>
         <p:spPr>
           <a:xfrm>
             <a:off x="516960" y="2371320"/>
-            <a:ext cx="5303880" cy="573840"/>
+            <a:ext cx="5303520" cy="573480"/>
           </a:xfrm>
           <a:prstGeom prst="rect">
             <a:avLst/>
@@ -4844,22 +4792,22 @@
               </a:rPr>
               <a:t>2</a:t>
             </a:r>
-            <a:endParaRPr b="0" lang="ru-RU" sz="1400" spc="-1" strike="noStrike">
-              <a:latin typeface="Arial"/>
-            </a:endParaRPr>
-          </a:p>
-        </p:txBody>
-      </p:sp>
-      <p:sp>
-        <p:nvSpPr>
-          <p:cNvPr id="164" name="TextBox 10"/>
+            <a:endParaRPr b="0" lang="en-US" sz="1400" spc="-1" strike="noStrike">
+              <a:latin typeface="Arial"/>
+            </a:endParaRPr>
+          </a:p>
+        </p:txBody>
+      </p:sp>
+      <p:sp>
+        <p:nvSpPr>
+          <p:cNvPr id="163" name="TextBox 10"/>
           <p:cNvSpPr/>
           <p:nvPr/>
         </p:nvSpPr>
         <p:spPr>
           <a:xfrm>
             <a:off x="516960" y="3016440"/>
-            <a:ext cx="5303880" cy="713520"/>
+            <a:ext cx="5303520" cy="713160"/>
           </a:xfrm>
           <a:prstGeom prst="rect">
             <a:avLst/>
@@ -4906,22 +4854,22 @@
               </a:rPr>
               <a:t>2</a:t>
             </a:r>
-            <a:endParaRPr b="0" lang="ru-RU" sz="1100" spc="-1" strike="noStrike">
-              <a:latin typeface="Arial"/>
-            </a:endParaRPr>
-          </a:p>
-        </p:txBody>
-      </p:sp>
-      <p:sp>
-        <p:nvSpPr>
-          <p:cNvPr id="165" name="TextBox 10"/>
+            <a:endParaRPr b="0" lang="en-US" sz="1100" spc="-1" strike="noStrike">
+              <a:latin typeface="Arial"/>
+            </a:endParaRPr>
+          </a:p>
+        </p:txBody>
+      </p:sp>
+      <p:sp>
+        <p:nvSpPr>
+          <p:cNvPr id="164" name="TextBox 10"/>
           <p:cNvSpPr/>
           <p:nvPr/>
         </p:nvSpPr>
         <p:spPr>
           <a:xfrm>
             <a:off x="516960" y="3612960"/>
-            <a:ext cx="5303880" cy="692280"/>
+            <a:ext cx="5303520" cy="691920"/>
           </a:xfrm>
           <a:prstGeom prst="rect">
             <a:avLst/>
@@ -4968,22 +4916,22 @@
               </a:rPr>
               <a:t>3</a:t>
             </a:r>
-            <a:endParaRPr b="0" lang="ru-RU" sz="1400" spc="-1" strike="noStrike">
-              <a:latin typeface="Arial"/>
-            </a:endParaRPr>
-          </a:p>
-        </p:txBody>
-      </p:sp>
-      <p:sp>
-        <p:nvSpPr>
-          <p:cNvPr id="166" name="TextBox 10"/>
+            <a:endParaRPr b="0" lang="en-US" sz="1400" spc="-1" strike="noStrike">
+              <a:latin typeface="Arial"/>
+            </a:endParaRPr>
+          </a:p>
+        </p:txBody>
+      </p:sp>
+      <p:sp>
+        <p:nvSpPr>
+          <p:cNvPr id="165" name="TextBox 10"/>
           <p:cNvSpPr/>
           <p:nvPr/>
         </p:nvSpPr>
         <p:spPr>
           <a:xfrm>
             <a:off x="516960" y="4376160"/>
-            <a:ext cx="5303880" cy="713520"/>
+            <a:ext cx="5303520" cy="713160"/>
           </a:xfrm>
           <a:prstGeom prst="rect">
             <a:avLst/>
@@ -5030,7 +4978,7 @@
               </a:rPr>
               <a:t>3</a:t>
             </a:r>
-            <a:endParaRPr b="0" lang="ru-RU" sz="1100" spc="-1" strike="noStrike">
+            <a:endParaRPr b="0" lang="en-US" sz="1100" spc="-1" strike="noStrike">
               <a:latin typeface="Arial"/>
             </a:endParaRPr>
           </a:p>
@@ -5075,14 +5023,14 @@
       </p:grpSpPr>
       <p:sp>
         <p:nvSpPr>
-          <p:cNvPr id="167" name="Прямоугольник со скругленными углами 3"/>
+          <p:cNvPr id="166" name="Прямоугольник со скругленными углами 3"/>
           <p:cNvSpPr/>
           <p:nvPr/>
         </p:nvSpPr>
         <p:spPr>
           <a:xfrm>
             <a:off x="186840" y="185400"/>
-            <a:ext cx="8769960" cy="4757760"/>
+            <a:ext cx="8769600" cy="4757400"/>
           </a:xfrm>
           <a:prstGeom prst="roundRect">
             <a:avLst>
@@ -5113,14 +5061,14 @@
       </p:sp>
       <p:sp>
         <p:nvSpPr>
-          <p:cNvPr id="168" name="Прямоугольник 10"/>
+          <p:cNvPr id="167" name="Прямоугольник 10"/>
           <p:cNvSpPr/>
           <p:nvPr/>
         </p:nvSpPr>
         <p:spPr>
           <a:xfrm>
             <a:off x="460080" y="658080"/>
-            <a:ext cx="8468640" cy="3306600"/>
+            <a:ext cx="8468280" cy="3306240"/>
           </a:xfrm>
           <a:prstGeom prst="rect">
             <a:avLst/>
@@ -5157,7 +5105,7 @@
               </a:rPr>
               <a:t>TITLE</a:t>
             </a:r>
-            <a:endParaRPr b="0" lang="ru-RU" sz="5400" spc="-1" strike="noStrike">
+            <a:endParaRPr b="0" lang="en-US" sz="5400" spc="-1" strike="noStrike">
               <a:latin typeface="Arial"/>
             </a:endParaRPr>
           </a:p>
@@ -5202,14 +5150,14 @@
       </p:grpSpPr>
       <p:sp>
         <p:nvSpPr>
-          <p:cNvPr id="50" name="Прямоугольник со скругленными углами 3"/>
+          <p:cNvPr id="49" name="Прямоугольник со скругленными углами 3"/>
           <p:cNvSpPr/>
           <p:nvPr/>
         </p:nvSpPr>
         <p:spPr>
           <a:xfrm>
             <a:off x="3507480" y="0"/>
-            <a:ext cx="5635800" cy="5142960"/>
+            <a:ext cx="5635440" cy="5142600"/>
           </a:xfrm>
           <a:prstGeom prst="roundRect">
             <a:avLst>
@@ -5258,22 +5206,22 @@
               </a:rPr>
               <a:t>PIC</a:t>
             </a:r>
-            <a:endParaRPr b="0" lang="ru-RU" sz="1800" spc="-1" strike="noStrike">
-              <a:latin typeface="Arial"/>
-            </a:endParaRPr>
-          </a:p>
-        </p:txBody>
-      </p:sp>
-      <p:sp>
-        <p:nvSpPr>
-          <p:cNvPr id="51" name="Прямоугольник: скругленные углы 2"/>
+            <a:endParaRPr b="0" lang="en-US" sz="1800" spc="-1" strike="noStrike">
+              <a:latin typeface="Arial"/>
+            </a:endParaRPr>
+          </a:p>
+        </p:txBody>
+      </p:sp>
+      <p:sp>
+        <p:nvSpPr>
+          <p:cNvPr id="50" name="Прямоугольник: скругленные углы 2"/>
           <p:cNvSpPr/>
           <p:nvPr/>
         </p:nvSpPr>
         <p:spPr>
           <a:xfrm>
             <a:off x="3722040" y="257040"/>
-            <a:ext cx="5185800" cy="4649760"/>
+            <a:ext cx="5185440" cy="4649400"/>
           </a:xfrm>
           <a:prstGeom prst="roundRect">
             <a:avLst>
@@ -5307,14 +5255,14 @@
       </p:sp>
       <p:sp>
         <p:nvSpPr>
-          <p:cNvPr id="52" name="Овал 1"/>
+          <p:cNvPr id="51" name="Овал 1"/>
           <p:cNvSpPr/>
           <p:nvPr/>
         </p:nvSpPr>
         <p:spPr>
           <a:xfrm>
             <a:off x="4122000" y="631080"/>
-            <a:ext cx="899280" cy="899280"/>
+            <a:ext cx="898920" cy="898920"/>
           </a:xfrm>
           <a:prstGeom prst="ellipse">
             <a:avLst/>
@@ -5361,22 +5309,22 @@
               </a:rPr>
               <a:t>01</a:t>
             </a:r>
-            <a:endParaRPr b="0" lang="ru-RU" sz="1800" spc="-1" strike="noStrike">
-              <a:latin typeface="Arial"/>
-            </a:endParaRPr>
-          </a:p>
-        </p:txBody>
-      </p:sp>
-      <p:sp>
-        <p:nvSpPr>
-          <p:cNvPr id="53" name="Овал 23"/>
+            <a:endParaRPr b="0" lang="en-US" sz="1800" spc="-1" strike="noStrike">
+              <a:latin typeface="Arial"/>
+            </a:endParaRPr>
+          </a:p>
+        </p:txBody>
+      </p:sp>
+      <p:sp>
+        <p:nvSpPr>
+          <p:cNvPr id="52" name="Овал 23"/>
           <p:cNvSpPr/>
           <p:nvPr/>
         </p:nvSpPr>
         <p:spPr>
           <a:xfrm>
             <a:off x="4122000" y="2127600"/>
-            <a:ext cx="899280" cy="887400"/>
+            <a:ext cx="898920" cy="887040"/>
           </a:xfrm>
           <a:prstGeom prst="ellipse">
             <a:avLst/>
@@ -5423,22 +5371,22 @@
               </a:rPr>
               <a:t>02</a:t>
             </a:r>
-            <a:endParaRPr b="0" lang="ru-RU" sz="1800" spc="-1" strike="noStrike">
-              <a:latin typeface="Arial"/>
-            </a:endParaRPr>
-          </a:p>
-        </p:txBody>
-      </p:sp>
-      <p:sp>
-        <p:nvSpPr>
-          <p:cNvPr id="54" name="Овал 29"/>
+            <a:endParaRPr b="0" lang="en-US" sz="1800" spc="-1" strike="noStrike">
+              <a:latin typeface="Arial"/>
+            </a:endParaRPr>
+          </a:p>
+        </p:txBody>
+      </p:sp>
+      <p:sp>
+        <p:nvSpPr>
+          <p:cNvPr id="53" name="Овал 29"/>
           <p:cNvSpPr/>
           <p:nvPr/>
         </p:nvSpPr>
         <p:spPr>
           <a:xfrm>
             <a:off x="4122000" y="3612240"/>
-            <a:ext cx="899280" cy="899280"/>
+            <a:ext cx="898920" cy="898920"/>
           </a:xfrm>
           <a:prstGeom prst="ellipse">
             <a:avLst/>
@@ -5485,22 +5433,22 @@
               </a:rPr>
               <a:t>03</a:t>
             </a:r>
-            <a:endParaRPr b="0" lang="ru-RU" sz="1800" spc="-1" strike="noStrike">
-              <a:latin typeface="Arial"/>
-            </a:endParaRPr>
-          </a:p>
-        </p:txBody>
-      </p:sp>
-      <p:sp>
-        <p:nvSpPr>
-          <p:cNvPr id="55" name="TextBox 10"/>
+            <a:endParaRPr b="0" lang="en-US" sz="1800" spc="-1" strike="noStrike">
+              <a:latin typeface="Arial"/>
+            </a:endParaRPr>
+          </a:p>
+        </p:txBody>
+      </p:sp>
+      <p:sp>
+        <p:nvSpPr>
+          <p:cNvPr id="54" name="TextBox 10"/>
           <p:cNvSpPr/>
           <p:nvPr/>
         </p:nvSpPr>
         <p:spPr>
           <a:xfrm>
             <a:off x="5110920" y="489600"/>
-            <a:ext cx="3578760" cy="550440"/>
+            <a:ext cx="3578400" cy="550080"/>
           </a:xfrm>
           <a:prstGeom prst="rect">
             <a:avLst/>
@@ -5547,22 +5495,22 @@
               </a:rPr>
               <a:t>1</a:t>
             </a:r>
-            <a:endParaRPr b="0" lang="ru-RU" sz="1400" spc="-1" strike="noStrike">
-              <a:latin typeface="Arial"/>
-            </a:endParaRPr>
-          </a:p>
-        </p:txBody>
-      </p:sp>
-      <p:sp>
-        <p:nvSpPr>
-          <p:cNvPr id="56" name="TextBox 10"/>
+            <a:endParaRPr b="0" lang="en-US" sz="1400" spc="-1" strike="noStrike">
+              <a:latin typeface="Arial"/>
+            </a:endParaRPr>
+          </a:p>
+        </p:txBody>
+      </p:sp>
+      <p:sp>
+        <p:nvSpPr>
+          <p:cNvPr id="55" name="TextBox 10"/>
           <p:cNvSpPr/>
           <p:nvPr/>
         </p:nvSpPr>
         <p:spPr>
           <a:xfrm>
             <a:off x="5110920" y="1025280"/>
-            <a:ext cx="3578760" cy="789480"/>
+            <a:ext cx="3578400" cy="789120"/>
           </a:xfrm>
           <a:prstGeom prst="rect">
             <a:avLst/>
@@ -5609,22 +5557,22 @@
               </a:rPr>
               <a:t>1</a:t>
             </a:r>
-            <a:endParaRPr b="0" lang="ru-RU" sz="1100" spc="-1" strike="noStrike">
-              <a:latin typeface="Arial"/>
-            </a:endParaRPr>
-          </a:p>
-        </p:txBody>
-      </p:sp>
-      <p:sp>
-        <p:nvSpPr>
-          <p:cNvPr id="57" name="TextBox 10"/>
+            <a:endParaRPr b="0" lang="en-US" sz="1100" spc="-1" strike="noStrike">
+              <a:latin typeface="Arial"/>
+            </a:endParaRPr>
+          </a:p>
+        </p:txBody>
+      </p:sp>
+      <p:sp>
+        <p:nvSpPr>
+          <p:cNvPr id="56" name="TextBox 10"/>
           <p:cNvSpPr/>
           <p:nvPr/>
         </p:nvSpPr>
         <p:spPr>
           <a:xfrm>
             <a:off x="5107320" y="1985400"/>
-            <a:ext cx="3578760" cy="550440"/>
+            <a:ext cx="3578400" cy="550080"/>
           </a:xfrm>
           <a:prstGeom prst="rect">
             <a:avLst/>
@@ -5661,22 +5609,22 @@
               </a:rPr>
               <a:t>SUBTITLE2</a:t>
             </a:r>
-            <a:endParaRPr b="0" lang="ru-RU" sz="1400" spc="-1" strike="noStrike">
-              <a:latin typeface="Arial"/>
-            </a:endParaRPr>
-          </a:p>
-        </p:txBody>
-      </p:sp>
-      <p:sp>
-        <p:nvSpPr>
-          <p:cNvPr id="58" name="TextBox 10"/>
+            <a:endParaRPr b="0" lang="en-US" sz="1400" spc="-1" strike="noStrike">
+              <a:latin typeface="Arial"/>
+            </a:endParaRPr>
+          </a:p>
+        </p:txBody>
+      </p:sp>
+      <p:sp>
+        <p:nvSpPr>
+          <p:cNvPr id="57" name="TextBox 10"/>
           <p:cNvSpPr/>
           <p:nvPr/>
         </p:nvSpPr>
         <p:spPr>
           <a:xfrm>
             <a:off x="5107320" y="2517840"/>
-            <a:ext cx="3578760" cy="843120"/>
+            <a:ext cx="3578400" cy="842760"/>
           </a:xfrm>
           <a:prstGeom prst="rect">
             <a:avLst/>
@@ -5723,22 +5671,22 @@
               </a:rPr>
               <a:t>2</a:t>
             </a:r>
-            <a:endParaRPr b="0" lang="ru-RU" sz="1100" spc="-1" strike="noStrike">
-              <a:latin typeface="Arial"/>
-            </a:endParaRPr>
-          </a:p>
-        </p:txBody>
-      </p:sp>
-      <p:sp>
-        <p:nvSpPr>
-          <p:cNvPr id="59" name="TextBox 10"/>
+            <a:endParaRPr b="0" lang="en-US" sz="1100" spc="-1" strike="noStrike">
+              <a:latin typeface="Arial"/>
+            </a:endParaRPr>
+          </a:p>
+        </p:txBody>
+      </p:sp>
+      <p:sp>
+        <p:nvSpPr>
+          <p:cNvPr id="58" name="TextBox 10"/>
           <p:cNvSpPr/>
           <p:nvPr/>
         </p:nvSpPr>
         <p:spPr>
           <a:xfrm>
             <a:off x="5107320" y="3470760"/>
-            <a:ext cx="3578760" cy="550440"/>
+            <a:ext cx="3578400" cy="550080"/>
           </a:xfrm>
           <a:prstGeom prst="rect">
             <a:avLst/>
@@ -5775,22 +5723,22 @@
               </a:rPr>
               <a:t>SUBTITLE3</a:t>
             </a:r>
-            <a:endParaRPr b="0" lang="ru-RU" sz="1400" spc="-1" strike="noStrike">
-              <a:latin typeface="Arial"/>
-            </a:endParaRPr>
-          </a:p>
-        </p:txBody>
-      </p:sp>
-      <p:sp>
-        <p:nvSpPr>
-          <p:cNvPr id="60" name="TextBox 10"/>
+            <a:endParaRPr b="0" lang="en-US" sz="1400" spc="-1" strike="noStrike">
+              <a:latin typeface="Arial"/>
+            </a:endParaRPr>
+          </a:p>
+        </p:txBody>
+      </p:sp>
+      <p:sp>
+        <p:nvSpPr>
+          <p:cNvPr id="59" name="TextBox 10"/>
           <p:cNvSpPr/>
           <p:nvPr/>
         </p:nvSpPr>
         <p:spPr>
           <a:xfrm>
             <a:off x="5107320" y="4003560"/>
-            <a:ext cx="3578760" cy="794520"/>
+            <a:ext cx="3578400" cy="794160"/>
           </a:xfrm>
           <a:prstGeom prst="rect">
             <a:avLst/>
@@ -5837,22 +5785,22 @@
               </a:rPr>
               <a:t>3</a:t>
             </a:r>
-            <a:endParaRPr b="0" lang="ru-RU" sz="1100" spc="-1" strike="noStrike">
-              <a:latin typeface="Arial"/>
-            </a:endParaRPr>
-          </a:p>
-        </p:txBody>
-      </p:sp>
-      <p:sp>
-        <p:nvSpPr>
-          <p:cNvPr id="61" name="TextBox 13"/>
+            <a:endParaRPr b="0" lang="en-US" sz="1100" spc="-1" strike="noStrike">
+              <a:latin typeface="Arial"/>
+            </a:endParaRPr>
+          </a:p>
+        </p:txBody>
+      </p:sp>
+      <p:sp>
+        <p:nvSpPr>
+          <p:cNvPr id="60" name="TextBox 13"/>
           <p:cNvSpPr/>
           <p:nvPr/>
         </p:nvSpPr>
         <p:spPr>
           <a:xfrm>
             <a:off x="165960" y="200880"/>
-            <a:ext cx="3147840" cy="1841760"/>
+            <a:ext cx="3147480" cy="1841400"/>
           </a:xfrm>
           <a:prstGeom prst="rect">
             <a:avLst/>
@@ -5889,7 +5837,7 @@
               </a:rPr>
               <a:t>TITLE</a:t>
             </a:r>
-            <a:endParaRPr b="0" lang="ru-RU" sz="2200" spc="-1" strike="noStrike">
+            <a:endParaRPr b="0" lang="en-US" sz="2200" spc="-1" strike="noStrike">
               <a:latin typeface="Arial"/>
             </a:endParaRPr>
           </a:p>
@@ -5934,14 +5882,14 @@
       </p:grpSpPr>
       <p:sp>
         <p:nvSpPr>
-          <p:cNvPr id="62" name="Прямоугольник со скругленными углами 3"/>
+          <p:cNvPr id="61" name="Прямоугольник со скругленными углами 3"/>
           <p:cNvSpPr/>
           <p:nvPr/>
         </p:nvSpPr>
         <p:spPr>
           <a:xfrm>
             <a:off x="0" y="0"/>
-            <a:ext cx="9143280" cy="1961280"/>
+            <a:ext cx="9142920" cy="1960920"/>
           </a:xfrm>
           <a:prstGeom prst="roundRect">
             <a:avLst>
@@ -5992,22 +5940,22 @@
               </a:rPr>
               <a:t>PIC</a:t>
             </a:r>
-            <a:endParaRPr b="0" lang="ru-RU" sz="1800" spc="-1" strike="noStrike">
-              <a:latin typeface="Arial"/>
-            </a:endParaRPr>
-          </a:p>
-        </p:txBody>
-      </p:sp>
-      <p:sp>
-        <p:nvSpPr>
-          <p:cNvPr id="63" name="TextBox 10"/>
+            <a:endParaRPr b="0" lang="en-US" sz="1800" spc="-1" strike="noStrike">
+              <a:latin typeface="Arial"/>
+            </a:endParaRPr>
+          </a:p>
+        </p:txBody>
+      </p:sp>
+      <p:sp>
+        <p:nvSpPr>
+          <p:cNvPr id="62" name="TextBox 10"/>
           <p:cNvSpPr/>
           <p:nvPr/>
         </p:nvSpPr>
         <p:spPr>
           <a:xfrm>
             <a:off x="384840" y="2571840"/>
-            <a:ext cx="2664720" cy="713520"/>
+            <a:ext cx="2664360" cy="713160"/>
           </a:xfrm>
           <a:prstGeom prst="rect">
             <a:avLst/>
@@ -6044,22 +5992,22 @@
               </a:rPr>
               <a:t>SUBTITLE1</a:t>
             </a:r>
-            <a:endParaRPr b="0" lang="ru-RU" sz="1400" spc="-1" strike="noStrike">
-              <a:latin typeface="Arial"/>
-            </a:endParaRPr>
-          </a:p>
-        </p:txBody>
-      </p:sp>
-      <p:sp>
-        <p:nvSpPr>
-          <p:cNvPr id="64" name="TextBox 10"/>
+            <a:endParaRPr b="0" lang="en-US" sz="1400" spc="-1" strike="noStrike">
+              <a:latin typeface="Arial"/>
+            </a:endParaRPr>
+          </a:p>
+        </p:txBody>
+      </p:sp>
+      <p:sp>
+        <p:nvSpPr>
+          <p:cNvPr id="63" name="TextBox 10"/>
           <p:cNvSpPr/>
           <p:nvPr/>
         </p:nvSpPr>
         <p:spPr>
           <a:xfrm>
             <a:off x="384840" y="3356280"/>
-            <a:ext cx="2664720" cy="1564920"/>
+            <a:ext cx="2664360" cy="1564560"/>
           </a:xfrm>
           <a:prstGeom prst="rect">
             <a:avLst/>
@@ -6106,22 +6054,22 @@
               </a:rPr>
               <a:t>1</a:t>
             </a:r>
-            <a:endParaRPr b="0" lang="ru-RU" sz="1100" spc="-1" strike="noStrike">
-              <a:latin typeface="Arial"/>
-            </a:endParaRPr>
-          </a:p>
-        </p:txBody>
-      </p:sp>
-      <p:sp>
-        <p:nvSpPr>
-          <p:cNvPr id="65" name="TextBox 10"/>
+            <a:endParaRPr b="0" lang="en-US" sz="1100" spc="-1" strike="noStrike">
+              <a:latin typeface="Arial"/>
+            </a:endParaRPr>
+          </a:p>
+        </p:txBody>
+      </p:sp>
+      <p:sp>
+        <p:nvSpPr>
+          <p:cNvPr id="64" name="TextBox 10"/>
           <p:cNvSpPr/>
           <p:nvPr/>
         </p:nvSpPr>
         <p:spPr>
           <a:xfrm>
             <a:off x="3239280" y="2571840"/>
-            <a:ext cx="2664720" cy="713520"/>
+            <a:ext cx="2664360" cy="713160"/>
           </a:xfrm>
           <a:prstGeom prst="rect">
             <a:avLst/>
@@ -6158,22 +6106,22 @@
               </a:rPr>
               <a:t>SUBTITLE2</a:t>
             </a:r>
-            <a:endParaRPr b="0" lang="ru-RU" sz="1400" spc="-1" strike="noStrike">
-              <a:latin typeface="Arial"/>
-            </a:endParaRPr>
-          </a:p>
-        </p:txBody>
-      </p:sp>
-      <p:sp>
-        <p:nvSpPr>
-          <p:cNvPr id="66" name="TextBox 10"/>
+            <a:endParaRPr b="0" lang="en-US" sz="1400" spc="-1" strike="noStrike">
+              <a:latin typeface="Arial"/>
+            </a:endParaRPr>
+          </a:p>
+        </p:txBody>
+      </p:sp>
+      <p:sp>
+        <p:nvSpPr>
+          <p:cNvPr id="65" name="TextBox 10"/>
           <p:cNvSpPr/>
           <p:nvPr/>
         </p:nvSpPr>
         <p:spPr>
           <a:xfrm>
             <a:off x="3239280" y="3356280"/>
-            <a:ext cx="2664720" cy="1564920"/>
+            <a:ext cx="2664360" cy="1564560"/>
           </a:xfrm>
           <a:prstGeom prst="rect">
             <a:avLst/>
@@ -6220,22 +6168,22 @@
               </a:rPr>
               <a:t>2</a:t>
             </a:r>
-            <a:endParaRPr b="0" lang="ru-RU" sz="1100" spc="-1" strike="noStrike">
-              <a:latin typeface="Arial"/>
-            </a:endParaRPr>
-          </a:p>
-        </p:txBody>
-      </p:sp>
-      <p:sp>
-        <p:nvSpPr>
-          <p:cNvPr id="67" name="TextBox 10"/>
+            <a:endParaRPr b="0" lang="en-US" sz="1100" spc="-1" strike="noStrike">
+              <a:latin typeface="Arial"/>
+            </a:endParaRPr>
+          </a:p>
+        </p:txBody>
+      </p:sp>
+      <p:sp>
+        <p:nvSpPr>
+          <p:cNvPr id="66" name="TextBox 10"/>
           <p:cNvSpPr/>
           <p:nvPr/>
         </p:nvSpPr>
         <p:spPr>
           <a:xfrm>
             <a:off x="6093720" y="2571840"/>
-            <a:ext cx="2664720" cy="713520"/>
+            <a:ext cx="2664360" cy="713160"/>
           </a:xfrm>
           <a:prstGeom prst="rect">
             <a:avLst/>
@@ -6272,22 +6220,22 @@
               </a:rPr>
               <a:t>SUBTITLE3</a:t>
             </a:r>
-            <a:endParaRPr b="0" lang="ru-RU" sz="1400" spc="-1" strike="noStrike">
-              <a:latin typeface="Arial"/>
-            </a:endParaRPr>
-          </a:p>
-        </p:txBody>
-      </p:sp>
-      <p:sp>
-        <p:nvSpPr>
-          <p:cNvPr id="68" name="TextBox 10"/>
+            <a:endParaRPr b="0" lang="en-US" sz="1400" spc="-1" strike="noStrike">
+              <a:latin typeface="Arial"/>
+            </a:endParaRPr>
+          </a:p>
+        </p:txBody>
+      </p:sp>
+      <p:sp>
+        <p:nvSpPr>
+          <p:cNvPr id="67" name="TextBox 10"/>
           <p:cNvSpPr/>
           <p:nvPr/>
         </p:nvSpPr>
         <p:spPr>
           <a:xfrm>
             <a:off x="6093720" y="3356280"/>
-            <a:ext cx="2664720" cy="1564920"/>
+            <a:ext cx="2664360" cy="1564560"/>
           </a:xfrm>
           <a:prstGeom prst="rect">
             <a:avLst/>
@@ -6334,22 +6282,22 @@
               </a:rPr>
               <a:t>3</a:t>
             </a:r>
-            <a:endParaRPr b="0" lang="ru-RU" sz="1100" spc="-1" strike="noStrike">
-              <a:latin typeface="Arial"/>
-            </a:endParaRPr>
-          </a:p>
-        </p:txBody>
-      </p:sp>
-      <p:sp>
-        <p:nvSpPr>
-          <p:cNvPr id="69" name="TextBox 9"/>
+            <a:endParaRPr b="0" lang="en-US" sz="1100" spc="-1" strike="noStrike">
+              <a:latin typeface="Arial"/>
+            </a:endParaRPr>
+          </a:p>
+        </p:txBody>
+      </p:sp>
+      <p:sp>
+        <p:nvSpPr>
+          <p:cNvPr id="68" name="TextBox 9"/>
           <p:cNvSpPr/>
           <p:nvPr/>
         </p:nvSpPr>
         <p:spPr>
           <a:xfrm>
             <a:off x="384840" y="2178000"/>
-            <a:ext cx="8465400" cy="480600"/>
+            <a:ext cx="8465040" cy="480240"/>
           </a:xfrm>
           <a:prstGeom prst="rect">
             <a:avLst/>
@@ -6386,7 +6334,7 @@
               </a:rPr>
               <a:t>TITLE</a:t>
             </a:r>
-            <a:endParaRPr b="0" lang="ru-RU" sz="2200" spc="-1" strike="noStrike">
+            <a:endParaRPr b="0" lang="en-US" sz="2200" spc="-1" strike="noStrike">
               <a:latin typeface="Arial"/>
             </a:endParaRPr>
           </a:p>
@@ -6431,14 +6379,14 @@
       </p:grpSpPr>
       <p:sp>
         <p:nvSpPr>
-          <p:cNvPr id="70" name="Прямоугольник: скругленные углы 15"/>
+          <p:cNvPr id="69" name="Прямоугольник: скругленные углы 15"/>
           <p:cNvSpPr/>
           <p:nvPr/>
         </p:nvSpPr>
         <p:spPr>
           <a:xfrm>
             <a:off x="4636440" y="250200"/>
-            <a:ext cx="4197960" cy="4624920"/>
+            <a:ext cx="4197600" cy="4624560"/>
           </a:xfrm>
           <a:prstGeom prst="roundRect">
             <a:avLst>
@@ -6489,22 +6437,22 @@
               </a:rPr>
               <a:t>PIC</a:t>
             </a:r>
-            <a:endParaRPr b="0" lang="ru-RU" sz="1800" spc="-1" strike="noStrike">
-              <a:latin typeface="Arial"/>
-            </a:endParaRPr>
-          </a:p>
-        </p:txBody>
-      </p:sp>
-      <p:sp>
-        <p:nvSpPr>
-          <p:cNvPr id="71" name="Прямоугольник: скругленные углы 16"/>
+            <a:endParaRPr b="0" lang="en-US" sz="1800" spc="-1" strike="noStrike">
+              <a:latin typeface="Arial"/>
+            </a:endParaRPr>
+          </a:p>
+        </p:txBody>
+      </p:sp>
+      <p:sp>
+        <p:nvSpPr>
+          <p:cNvPr id="70" name="Прямоугольник: скругленные углы 16"/>
           <p:cNvSpPr/>
           <p:nvPr/>
         </p:nvSpPr>
         <p:spPr>
           <a:xfrm>
             <a:off x="329400" y="257040"/>
-            <a:ext cx="4197960" cy="4624920"/>
+            <a:ext cx="4197600" cy="4624560"/>
           </a:xfrm>
           <a:prstGeom prst="roundRect">
             <a:avLst>
@@ -6538,14 +6486,14 @@
       </p:sp>
       <p:sp>
         <p:nvSpPr>
-          <p:cNvPr id="72" name="Овал 9"/>
+          <p:cNvPr id="71" name="Овал 9"/>
           <p:cNvSpPr/>
           <p:nvPr/>
         </p:nvSpPr>
         <p:spPr>
           <a:xfrm>
             <a:off x="4272120" y="1193040"/>
-            <a:ext cx="635040" cy="635040"/>
+            <a:ext cx="634680" cy="634680"/>
           </a:xfrm>
           <a:prstGeom prst="ellipse">
             <a:avLst/>
@@ -6574,14 +6522,14 @@
       </p:sp>
       <p:sp>
         <p:nvSpPr>
-          <p:cNvPr id="73" name="TextBox 10"/>
+          <p:cNvPr id="72" name="TextBox 10"/>
           <p:cNvSpPr/>
           <p:nvPr/>
         </p:nvSpPr>
         <p:spPr>
           <a:xfrm>
             <a:off x="581760" y="828720"/>
-            <a:ext cx="3693240" cy="550440"/>
+            <a:ext cx="3692880" cy="550080"/>
           </a:xfrm>
           <a:prstGeom prst="rect">
             <a:avLst/>
@@ -6628,22 +6576,22 @@
               </a:rPr>
               <a:t>1</a:t>
             </a:r>
-            <a:endParaRPr b="0" lang="ru-RU" sz="1400" spc="-1" strike="noStrike">
-              <a:latin typeface="Arial"/>
-            </a:endParaRPr>
-          </a:p>
-        </p:txBody>
-      </p:sp>
-      <p:sp>
-        <p:nvSpPr>
-          <p:cNvPr id="74" name="TextBox 10"/>
+            <a:endParaRPr b="0" lang="en-US" sz="1400" spc="-1" strike="noStrike">
+              <a:latin typeface="Arial"/>
+            </a:endParaRPr>
+          </a:p>
+        </p:txBody>
+      </p:sp>
+      <p:sp>
+        <p:nvSpPr>
+          <p:cNvPr id="73" name="TextBox 10"/>
           <p:cNvSpPr/>
           <p:nvPr/>
         </p:nvSpPr>
         <p:spPr>
           <a:xfrm>
             <a:off x="581760" y="1364400"/>
-            <a:ext cx="3693240" cy="789480"/>
+            <a:ext cx="3692880" cy="789120"/>
           </a:xfrm>
           <a:prstGeom prst="rect">
             <a:avLst/>
@@ -6690,22 +6638,22 @@
               </a:rPr>
               <a:t>1</a:t>
             </a:r>
-            <a:endParaRPr b="0" lang="ru-RU" sz="1100" spc="-1" strike="noStrike">
-              <a:latin typeface="Arial"/>
-            </a:endParaRPr>
-          </a:p>
-        </p:txBody>
-      </p:sp>
-      <p:sp>
-        <p:nvSpPr>
-          <p:cNvPr id="75" name="TextBox 10"/>
+            <a:endParaRPr b="0" lang="en-US" sz="1100" spc="-1" strike="noStrike">
+              <a:latin typeface="Arial"/>
+            </a:endParaRPr>
+          </a:p>
+        </p:txBody>
+      </p:sp>
+      <p:sp>
+        <p:nvSpPr>
+          <p:cNvPr id="74" name="TextBox 10"/>
           <p:cNvSpPr/>
           <p:nvPr/>
         </p:nvSpPr>
         <p:spPr>
           <a:xfrm>
             <a:off x="578160" y="2154600"/>
-            <a:ext cx="3693240" cy="550440"/>
+            <a:ext cx="3692880" cy="550080"/>
           </a:xfrm>
           <a:prstGeom prst="rect">
             <a:avLst/>
@@ -6742,22 +6690,22 @@
               </a:rPr>
               <a:t>SUBTITLE2</a:t>
             </a:r>
-            <a:endParaRPr b="0" lang="ru-RU" sz="1400" spc="-1" strike="noStrike">
-              <a:latin typeface="Arial"/>
-            </a:endParaRPr>
-          </a:p>
-        </p:txBody>
-      </p:sp>
-      <p:sp>
-        <p:nvSpPr>
-          <p:cNvPr id="76" name="TextBox 10"/>
+            <a:endParaRPr b="0" lang="en-US" sz="1400" spc="-1" strike="noStrike">
+              <a:latin typeface="Arial"/>
+            </a:endParaRPr>
+          </a:p>
+        </p:txBody>
+      </p:sp>
+      <p:sp>
+        <p:nvSpPr>
+          <p:cNvPr id="75" name="TextBox 10"/>
           <p:cNvSpPr/>
           <p:nvPr/>
         </p:nvSpPr>
         <p:spPr>
           <a:xfrm>
             <a:off x="578160" y="2687040"/>
-            <a:ext cx="3693240" cy="843120"/>
+            <a:ext cx="3692880" cy="842760"/>
           </a:xfrm>
           <a:prstGeom prst="rect">
             <a:avLst/>
@@ -6804,22 +6752,22 @@
               </a:rPr>
               <a:t>2</a:t>
             </a:r>
-            <a:endParaRPr b="0" lang="ru-RU" sz="1100" spc="-1" strike="noStrike">
-              <a:latin typeface="Arial"/>
-            </a:endParaRPr>
-          </a:p>
-        </p:txBody>
-      </p:sp>
-      <p:sp>
-        <p:nvSpPr>
-          <p:cNvPr id="77" name="TextBox 10"/>
+            <a:endParaRPr b="0" lang="en-US" sz="1100" spc="-1" strike="noStrike">
+              <a:latin typeface="Arial"/>
+            </a:endParaRPr>
+          </a:p>
+        </p:txBody>
+      </p:sp>
+      <p:sp>
+        <p:nvSpPr>
+          <p:cNvPr id="76" name="TextBox 10"/>
           <p:cNvSpPr/>
           <p:nvPr/>
         </p:nvSpPr>
         <p:spPr>
           <a:xfrm>
             <a:off x="578160" y="3482280"/>
-            <a:ext cx="3693240" cy="550440"/>
+            <a:ext cx="3692880" cy="550080"/>
           </a:xfrm>
           <a:prstGeom prst="rect">
             <a:avLst/>
@@ -6856,22 +6804,22 @@
               </a:rPr>
               <a:t>SUBTITLE3</a:t>
             </a:r>
-            <a:endParaRPr b="0" lang="ru-RU" sz="1400" spc="-1" strike="noStrike">
-              <a:latin typeface="Arial"/>
-            </a:endParaRPr>
-          </a:p>
-        </p:txBody>
-      </p:sp>
-      <p:sp>
-        <p:nvSpPr>
-          <p:cNvPr id="78" name="TextBox 10"/>
+            <a:endParaRPr b="0" lang="en-US" sz="1400" spc="-1" strike="noStrike">
+              <a:latin typeface="Arial"/>
+            </a:endParaRPr>
+          </a:p>
+        </p:txBody>
+      </p:sp>
+      <p:sp>
+        <p:nvSpPr>
+          <p:cNvPr id="77" name="TextBox 10"/>
           <p:cNvSpPr/>
           <p:nvPr/>
         </p:nvSpPr>
         <p:spPr>
           <a:xfrm>
             <a:off x="578160" y="4015080"/>
-            <a:ext cx="3693240" cy="794520"/>
+            <a:ext cx="3692880" cy="794160"/>
           </a:xfrm>
           <a:prstGeom prst="rect">
             <a:avLst/>
@@ -6918,22 +6866,22 @@
               </a:rPr>
               <a:t>3</a:t>
             </a:r>
-            <a:endParaRPr b="0" lang="ru-RU" sz="1100" spc="-1" strike="noStrike">
-              <a:latin typeface="Arial"/>
-            </a:endParaRPr>
-          </a:p>
-        </p:txBody>
-      </p:sp>
-      <p:sp>
-        <p:nvSpPr>
-          <p:cNvPr id="79" name="TextBox 30"/>
+            <a:endParaRPr b="0" lang="en-US" sz="1100" spc="-1" strike="noStrike">
+              <a:latin typeface="Arial"/>
+            </a:endParaRPr>
+          </a:p>
+        </p:txBody>
+      </p:sp>
+      <p:sp>
+        <p:nvSpPr>
+          <p:cNvPr id="78" name="TextBox 30"/>
           <p:cNvSpPr/>
           <p:nvPr/>
         </p:nvSpPr>
         <p:spPr>
           <a:xfrm>
             <a:off x="553680" y="352440"/>
-            <a:ext cx="3803400" cy="789480"/>
+            <a:ext cx="3803040" cy="789120"/>
           </a:xfrm>
           <a:prstGeom prst="rect">
             <a:avLst/>
@@ -6970,7 +6918,7 @@
               </a:rPr>
               <a:t>TITLE</a:t>
             </a:r>
-            <a:endParaRPr b="0" lang="ru-RU" sz="2200" spc="-1" strike="noStrike">
+            <a:endParaRPr b="0" lang="en-US" sz="2200" spc="-1" strike="noStrike">
               <a:latin typeface="Arial"/>
             </a:endParaRPr>
           </a:p>
@@ -7015,14 +6963,14 @@
       </p:grpSpPr>
       <p:sp>
         <p:nvSpPr>
-          <p:cNvPr id="80" name="TextBox 20"/>
+          <p:cNvPr id="79" name="TextBox 20"/>
           <p:cNvSpPr/>
           <p:nvPr/>
         </p:nvSpPr>
         <p:spPr>
           <a:xfrm>
             <a:off x="516960" y="411840"/>
-            <a:ext cx="8465400" cy="480600"/>
+            <a:ext cx="8465040" cy="480240"/>
           </a:xfrm>
           <a:prstGeom prst="rect">
             <a:avLst/>
@@ -7059,22 +7007,22 @@
               </a:rPr>
               <a:t>TITLE</a:t>
             </a:r>
-            <a:endParaRPr b="0" lang="ru-RU" sz="2200" spc="-1" strike="noStrike">
-              <a:latin typeface="Arial"/>
-            </a:endParaRPr>
-          </a:p>
-        </p:txBody>
-      </p:sp>
-      <p:sp>
-        <p:nvSpPr>
-          <p:cNvPr id="81" name="Прямоугольник со скругленными углами 3"/>
+            <a:endParaRPr b="0" lang="en-US" sz="2200" spc="-1" strike="noStrike">
+              <a:latin typeface="Arial"/>
+            </a:endParaRPr>
+          </a:p>
+        </p:txBody>
+      </p:sp>
+      <p:sp>
+        <p:nvSpPr>
+          <p:cNvPr id="80" name="Прямоугольник со скругленными углами 3"/>
           <p:cNvSpPr/>
           <p:nvPr/>
         </p:nvSpPr>
         <p:spPr>
           <a:xfrm>
             <a:off x="456480" y="1406160"/>
-            <a:ext cx="2300400" cy="1439640"/>
+            <a:ext cx="2300040" cy="1439280"/>
           </a:xfrm>
           <a:prstGeom prst="roundRect">
             <a:avLst>
@@ -7125,22 +7073,22 @@
               </a:rPr>
               <a:t>PIC</a:t>
             </a:r>
-            <a:endParaRPr b="0" lang="ru-RU" sz="1800" spc="-1" strike="noStrike">
-              <a:latin typeface="Arial"/>
-            </a:endParaRPr>
-          </a:p>
-        </p:txBody>
-      </p:sp>
-      <p:sp>
-        <p:nvSpPr>
-          <p:cNvPr id="82" name="TextBox 10"/>
+            <a:endParaRPr b="0" lang="en-US" sz="1800" spc="-1" strike="noStrike">
+              <a:latin typeface="Arial"/>
+            </a:endParaRPr>
+          </a:p>
+        </p:txBody>
+      </p:sp>
+      <p:sp>
+        <p:nvSpPr>
+          <p:cNvPr id="81" name="TextBox 10"/>
           <p:cNvSpPr/>
           <p:nvPr/>
         </p:nvSpPr>
         <p:spPr>
           <a:xfrm>
             <a:off x="384840" y="3013560"/>
-            <a:ext cx="2428920" cy="713520"/>
+            <a:ext cx="2428560" cy="713160"/>
           </a:xfrm>
           <a:prstGeom prst="rect">
             <a:avLst/>
@@ -7177,22 +7125,22 @@
               </a:rPr>
               <a:t>SUBTITLE1</a:t>
             </a:r>
-            <a:endParaRPr b="0" lang="ru-RU" sz="1400" spc="-1" strike="noStrike">
-              <a:latin typeface="Arial"/>
-            </a:endParaRPr>
-          </a:p>
-        </p:txBody>
-      </p:sp>
-      <p:sp>
-        <p:nvSpPr>
-          <p:cNvPr id="83" name="TextBox 10"/>
+            <a:endParaRPr b="0" lang="en-US" sz="1400" spc="-1" strike="noStrike">
+              <a:latin typeface="Arial"/>
+            </a:endParaRPr>
+          </a:p>
+        </p:txBody>
+      </p:sp>
+      <p:sp>
+        <p:nvSpPr>
+          <p:cNvPr id="82" name="TextBox 10"/>
           <p:cNvSpPr/>
           <p:nvPr/>
         </p:nvSpPr>
         <p:spPr>
           <a:xfrm>
             <a:off x="384840" y="3798000"/>
-            <a:ext cx="2428920" cy="1037520"/>
+            <a:ext cx="2428560" cy="1037160"/>
           </a:xfrm>
           <a:prstGeom prst="rect">
             <a:avLst/>
@@ -7239,22 +7187,22 @@
               </a:rPr>
               <a:t>1</a:t>
             </a:r>
-            <a:endParaRPr b="0" lang="ru-RU" sz="1100" spc="-1" strike="noStrike">
-              <a:latin typeface="Arial"/>
-            </a:endParaRPr>
-          </a:p>
-        </p:txBody>
-      </p:sp>
-      <p:sp>
-        <p:nvSpPr>
-          <p:cNvPr id="84" name="Прямоугольник: скругленные углы 1"/>
+            <a:endParaRPr b="0" lang="en-US" sz="1100" spc="-1" strike="noStrike">
+              <a:latin typeface="Arial"/>
+            </a:endParaRPr>
+          </a:p>
+        </p:txBody>
+      </p:sp>
+      <p:sp>
+        <p:nvSpPr>
+          <p:cNvPr id="83" name="Прямоугольник: скругленные углы 1"/>
           <p:cNvSpPr/>
           <p:nvPr/>
         </p:nvSpPr>
         <p:spPr>
           <a:xfrm>
             <a:off x="328680" y="228600"/>
-            <a:ext cx="8501040" cy="813600"/>
+            <a:ext cx="8500680" cy="813240"/>
           </a:xfrm>
           <a:prstGeom prst="roundRect">
             <a:avLst>
@@ -7285,14 +7233,14 @@
       </p:sp>
       <p:sp>
         <p:nvSpPr>
-          <p:cNvPr id="85" name="Прямоугольник: скругленные углы 10"/>
+          <p:cNvPr id="84" name="Прямоугольник: скругленные углы 10"/>
           <p:cNvSpPr/>
           <p:nvPr/>
         </p:nvSpPr>
         <p:spPr>
           <a:xfrm>
             <a:off x="328680" y="1279080"/>
-            <a:ext cx="2556720" cy="3642480"/>
+            <a:ext cx="2556360" cy="3642120"/>
           </a:xfrm>
           <a:prstGeom prst="roundRect">
             <a:avLst>
@@ -7323,14 +7271,14 @@
       </p:sp>
       <p:sp>
         <p:nvSpPr>
-          <p:cNvPr id="86" name="Прямоугольник со скругленными углами 3"/>
+          <p:cNvPr id="85" name="Прямоугольник со скругленными углами 3"/>
           <p:cNvSpPr/>
           <p:nvPr/>
         </p:nvSpPr>
         <p:spPr>
           <a:xfrm>
             <a:off x="3421080" y="1398960"/>
-            <a:ext cx="2300400" cy="1439640"/>
+            <a:ext cx="2300040" cy="1439280"/>
           </a:xfrm>
           <a:prstGeom prst="roundRect">
             <a:avLst>
@@ -7381,22 +7329,22 @@
               </a:rPr>
               <a:t>PIC</a:t>
             </a:r>
-            <a:endParaRPr b="0" lang="ru-RU" sz="1800" spc="-1" strike="noStrike">
-              <a:latin typeface="Arial"/>
-            </a:endParaRPr>
-          </a:p>
-        </p:txBody>
-      </p:sp>
-      <p:sp>
-        <p:nvSpPr>
-          <p:cNvPr id="87" name="TextBox 10"/>
+            <a:endParaRPr b="0" lang="en-US" sz="1800" spc="-1" strike="noStrike">
+              <a:latin typeface="Arial"/>
+            </a:endParaRPr>
+          </a:p>
+        </p:txBody>
+      </p:sp>
+      <p:sp>
+        <p:nvSpPr>
+          <p:cNvPr id="86" name="TextBox 10"/>
           <p:cNvSpPr/>
           <p:nvPr/>
         </p:nvSpPr>
         <p:spPr>
           <a:xfrm>
             <a:off x="3349440" y="3013560"/>
-            <a:ext cx="2428920" cy="713520"/>
+            <a:ext cx="2428560" cy="713160"/>
           </a:xfrm>
           <a:prstGeom prst="rect">
             <a:avLst/>
@@ -7443,22 +7391,22 @@
               </a:rPr>
               <a:t>2</a:t>
             </a:r>
-            <a:endParaRPr b="0" lang="ru-RU" sz="1400" spc="-1" strike="noStrike">
-              <a:latin typeface="Arial"/>
-            </a:endParaRPr>
-          </a:p>
-        </p:txBody>
-      </p:sp>
-      <p:sp>
-        <p:nvSpPr>
-          <p:cNvPr id="88" name="TextBox 10"/>
+            <a:endParaRPr b="0" lang="en-US" sz="1400" spc="-1" strike="noStrike">
+              <a:latin typeface="Arial"/>
+            </a:endParaRPr>
+          </a:p>
+        </p:txBody>
+      </p:sp>
+      <p:sp>
+        <p:nvSpPr>
+          <p:cNvPr id="87" name="TextBox 10"/>
           <p:cNvSpPr/>
           <p:nvPr/>
         </p:nvSpPr>
         <p:spPr>
           <a:xfrm>
             <a:off x="3349440" y="3798000"/>
-            <a:ext cx="2428920" cy="1037520"/>
+            <a:ext cx="2428560" cy="1037160"/>
           </a:xfrm>
           <a:prstGeom prst="rect">
             <a:avLst/>
@@ -7505,22 +7453,22 @@
               </a:rPr>
               <a:t>2</a:t>
             </a:r>
-            <a:endParaRPr b="0" lang="ru-RU" sz="1100" spc="-1" strike="noStrike">
-              <a:latin typeface="Arial"/>
-            </a:endParaRPr>
-          </a:p>
-        </p:txBody>
-      </p:sp>
-      <p:sp>
-        <p:nvSpPr>
-          <p:cNvPr id="89" name="Прямоугольник: скругленные углы 14"/>
+            <a:endParaRPr b="0" lang="en-US" sz="1100" spc="-1" strike="noStrike">
+              <a:latin typeface="Arial"/>
+            </a:endParaRPr>
+          </a:p>
+        </p:txBody>
+      </p:sp>
+      <p:sp>
+        <p:nvSpPr>
+          <p:cNvPr id="88" name="Прямоугольник: скругленные углы 14"/>
           <p:cNvSpPr/>
           <p:nvPr/>
         </p:nvSpPr>
         <p:spPr>
           <a:xfrm>
             <a:off x="3293280" y="1271880"/>
-            <a:ext cx="2556720" cy="3642480"/>
+            <a:ext cx="2556360" cy="3642120"/>
           </a:xfrm>
           <a:prstGeom prst="roundRect">
             <a:avLst>
@@ -7551,14 +7499,14 @@
       </p:sp>
       <p:sp>
         <p:nvSpPr>
-          <p:cNvPr id="90" name="Прямоугольник со скругленными углами 3"/>
+          <p:cNvPr id="89" name="Прямоугольник со скругленными углами 3"/>
           <p:cNvSpPr/>
           <p:nvPr/>
         </p:nvSpPr>
         <p:spPr>
           <a:xfrm>
             <a:off x="6400800" y="1379520"/>
-            <a:ext cx="2300400" cy="1439640"/>
+            <a:ext cx="2300040" cy="1439280"/>
           </a:xfrm>
           <a:prstGeom prst="roundRect">
             <a:avLst>
@@ -7609,22 +7557,22 @@
               </a:rPr>
               <a:t>PIC</a:t>
             </a:r>
-            <a:endParaRPr b="0" lang="ru-RU" sz="1800" spc="-1" strike="noStrike">
-              <a:latin typeface="Arial"/>
-            </a:endParaRPr>
-          </a:p>
-        </p:txBody>
-      </p:sp>
-      <p:sp>
-        <p:nvSpPr>
-          <p:cNvPr id="91" name="TextBox 10"/>
+            <a:endParaRPr b="0" lang="en-US" sz="1800" spc="-1" strike="noStrike">
+              <a:latin typeface="Arial"/>
+            </a:endParaRPr>
+          </a:p>
+        </p:txBody>
+      </p:sp>
+      <p:sp>
+        <p:nvSpPr>
+          <p:cNvPr id="90" name="TextBox 10"/>
           <p:cNvSpPr/>
           <p:nvPr/>
         </p:nvSpPr>
         <p:spPr>
           <a:xfrm>
             <a:off x="6329520" y="3013560"/>
-            <a:ext cx="2428920" cy="713520"/>
+            <a:ext cx="2428560" cy="713160"/>
           </a:xfrm>
           <a:prstGeom prst="rect">
             <a:avLst/>
@@ -7671,22 +7619,22 @@
               </a:rPr>
               <a:t>3</a:t>
             </a:r>
-            <a:endParaRPr b="0" lang="ru-RU" sz="1400" spc="-1" strike="noStrike">
-              <a:latin typeface="Arial"/>
-            </a:endParaRPr>
-          </a:p>
-        </p:txBody>
-      </p:sp>
-      <p:sp>
-        <p:nvSpPr>
-          <p:cNvPr id="92" name="TextBox 10"/>
+            <a:endParaRPr b="0" lang="en-US" sz="1400" spc="-1" strike="noStrike">
+              <a:latin typeface="Arial"/>
+            </a:endParaRPr>
+          </a:p>
+        </p:txBody>
+      </p:sp>
+      <p:sp>
+        <p:nvSpPr>
+          <p:cNvPr id="91" name="TextBox 10"/>
           <p:cNvSpPr/>
           <p:nvPr/>
         </p:nvSpPr>
         <p:spPr>
           <a:xfrm>
             <a:off x="6329520" y="3798000"/>
-            <a:ext cx="2428920" cy="1037520"/>
+            <a:ext cx="2428560" cy="1037160"/>
           </a:xfrm>
           <a:prstGeom prst="rect">
             <a:avLst/>
@@ -7733,22 +7681,22 @@
               </a:rPr>
               <a:t>3</a:t>
             </a:r>
-            <a:endParaRPr b="0" lang="ru-RU" sz="1100" spc="-1" strike="noStrike">
-              <a:latin typeface="Arial"/>
-            </a:endParaRPr>
-          </a:p>
-        </p:txBody>
-      </p:sp>
-      <p:sp>
-        <p:nvSpPr>
-          <p:cNvPr id="93" name="Прямоугольник: скругленные углы 19"/>
+            <a:endParaRPr b="0" lang="en-US" sz="1100" spc="-1" strike="noStrike">
+              <a:latin typeface="Arial"/>
+            </a:endParaRPr>
+          </a:p>
+        </p:txBody>
+      </p:sp>
+      <p:sp>
+        <p:nvSpPr>
+          <p:cNvPr id="92" name="Прямоугольник: скругленные углы 19"/>
           <p:cNvSpPr/>
           <p:nvPr/>
         </p:nvSpPr>
         <p:spPr>
           <a:xfrm>
             <a:off x="6273000" y="1252800"/>
-            <a:ext cx="2556720" cy="3642480"/>
+            <a:ext cx="2556360" cy="3642120"/>
           </a:xfrm>
           <a:prstGeom prst="roundRect">
             <a:avLst>
@@ -7816,14 +7764,14 @@
       </p:grpSpPr>
       <p:sp>
         <p:nvSpPr>
-          <p:cNvPr id="94" name="Прямоугольник со скругленными углами 3"/>
+          <p:cNvPr id="93" name="Прямоугольник со скругленными углами 3"/>
           <p:cNvSpPr/>
           <p:nvPr/>
         </p:nvSpPr>
         <p:spPr>
           <a:xfrm>
             <a:off x="0" y="0"/>
-            <a:ext cx="3396600" cy="5142960"/>
+            <a:ext cx="3396240" cy="5142600"/>
           </a:xfrm>
           <a:prstGeom prst="roundRect">
             <a:avLst>
@@ -7874,22 +7822,22 @@
               </a:rPr>
               <a:t>PIC</a:t>
             </a:r>
-            <a:endParaRPr b="0" lang="ru-RU" sz="1800" spc="-1" strike="noStrike">
-              <a:latin typeface="Arial"/>
-            </a:endParaRPr>
-          </a:p>
-        </p:txBody>
-      </p:sp>
-      <p:sp>
-        <p:nvSpPr>
-          <p:cNvPr id="95" name="TextBox 10"/>
+            <a:endParaRPr b="0" lang="en-US" sz="1800" spc="-1" strike="noStrike">
+              <a:latin typeface="Arial"/>
+            </a:endParaRPr>
+          </a:p>
+        </p:txBody>
+      </p:sp>
+      <p:sp>
+        <p:nvSpPr>
+          <p:cNvPr id="94" name="TextBox 10"/>
           <p:cNvSpPr/>
           <p:nvPr/>
         </p:nvSpPr>
         <p:spPr>
           <a:xfrm>
             <a:off x="4192560" y="3830040"/>
-            <a:ext cx="4672080" cy="328680"/>
+            <a:ext cx="4671720" cy="328320"/>
           </a:xfrm>
           <a:prstGeom prst="rect">
             <a:avLst/>
@@ -7926,22 +7874,22 @@
               </a:rPr>
               <a:t>SUBTITLE3</a:t>
             </a:r>
-            <a:endParaRPr b="0" lang="ru-RU" sz="1400" spc="-1" strike="noStrike">
-              <a:latin typeface="Arial"/>
-            </a:endParaRPr>
-          </a:p>
-        </p:txBody>
-      </p:sp>
-      <p:sp>
-        <p:nvSpPr>
-          <p:cNvPr id="96" name="TextBox 10"/>
+            <a:endParaRPr b="0" lang="en-US" sz="1400" spc="-1" strike="noStrike">
+              <a:latin typeface="Arial"/>
+            </a:endParaRPr>
+          </a:p>
+        </p:txBody>
+      </p:sp>
+      <p:sp>
+        <p:nvSpPr>
+          <p:cNvPr id="95" name="TextBox 10"/>
           <p:cNvSpPr/>
           <p:nvPr/>
         </p:nvSpPr>
         <p:spPr>
           <a:xfrm>
             <a:off x="4192560" y="4188600"/>
-            <a:ext cx="4672080" cy="713520"/>
+            <a:ext cx="4671720" cy="713160"/>
           </a:xfrm>
           <a:prstGeom prst="rect">
             <a:avLst/>
@@ -7988,22 +7936,22 @@
               </a:rPr>
               <a:t>3</a:t>
             </a:r>
-            <a:endParaRPr b="0" lang="ru-RU" sz="1100" spc="-1" strike="noStrike">
-              <a:latin typeface="Arial"/>
-            </a:endParaRPr>
-          </a:p>
-        </p:txBody>
-      </p:sp>
-      <p:sp>
-        <p:nvSpPr>
-          <p:cNvPr id="97" name="Овал 9"/>
+            <a:endParaRPr b="0" lang="en-US" sz="1100" spc="-1" strike="noStrike">
+              <a:latin typeface="Arial"/>
+            </a:endParaRPr>
+          </a:p>
+        </p:txBody>
+      </p:sp>
+      <p:sp>
+        <p:nvSpPr>
+          <p:cNvPr id="96" name="Овал 9"/>
           <p:cNvSpPr/>
           <p:nvPr/>
         </p:nvSpPr>
         <p:spPr>
           <a:xfrm>
             <a:off x="3724560" y="3830040"/>
-            <a:ext cx="402840" cy="402840"/>
+            <a:ext cx="402480" cy="402480"/>
           </a:xfrm>
           <a:prstGeom prst="ellipse">
             <a:avLst/>
@@ -8050,22 +7998,22 @@
               </a:rPr>
               <a:t>03</a:t>
             </a:r>
-            <a:endParaRPr b="0" lang="ru-RU" sz="800" spc="-1" strike="noStrike">
-              <a:latin typeface="Arial"/>
-            </a:endParaRPr>
-          </a:p>
-        </p:txBody>
-      </p:sp>
-      <p:sp>
-        <p:nvSpPr>
-          <p:cNvPr id="98" name="TextBox 10"/>
+            <a:endParaRPr b="0" lang="en-US" sz="800" spc="-1" strike="noStrike">
+              <a:latin typeface="Arial"/>
+            </a:endParaRPr>
+          </a:p>
+        </p:txBody>
+      </p:sp>
+      <p:sp>
+        <p:nvSpPr>
+          <p:cNvPr id="97" name="TextBox 10"/>
           <p:cNvSpPr/>
           <p:nvPr/>
         </p:nvSpPr>
         <p:spPr>
           <a:xfrm>
             <a:off x="4192560" y="2571840"/>
-            <a:ext cx="4672080" cy="328680"/>
+            <a:ext cx="4671720" cy="328320"/>
           </a:xfrm>
           <a:prstGeom prst="rect">
             <a:avLst/>
@@ -8112,22 +8060,22 @@
               </a:rPr>
               <a:t>2</a:t>
             </a:r>
-            <a:endParaRPr b="0" lang="ru-RU" sz="1400" spc="-1" strike="noStrike">
-              <a:latin typeface="Arial"/>
-            </a:endParaRPr>
-          </a:p>
-        </p:txBody>
-      </p:sp>
-      <p:sp>
-        <p:nvSpPr>
-          <p:cNvPr id="99" name="TextBox 10"/>
+            <a:endParaRPr b="0" lang="en-US" sz="1400" spc="-1" strike="noStrike">
+              <a:latin typeface="Arial"/>
+            </a:endParaRPr>
+          </a:p>
+        </p:txBody>
+      </p:sp>
+      <p:sp>
+        <p:nvSpPr>
+          <p:cNvPr id="98" name="TextBox 10"/>
           <p:cNvSpPr/>
           <p:nvPr/>
         </p:nvSpPr>
         <p:spPr>
           <a:xfrm>
             <a:off x="4192560" y="2930400"/>
-            <a:ext cx="4672080" cy="713520"/>
+            <a:ext cx="4671720" cy="713160"/>
           </a:xfrm>
           <a:prstGeom prst="rect">
             <a:avLst/>
@@ -8174,22 +8122,22 @@
               </a:rPr>
               <a:t>2</a:t>
             </a:r>
-            <a:endParaRPr b="0" lang="ru-RU" sz="1100" spc="-1" strike="noStrike">
-              <a:latin typeface="Arial"/>
-            </a:endParaRPr>
-          </a:p>
-        </p:txBody>
-      </p:sp>
-      <p:sp>
-        <p:nvSpPr>
-          <p:cNvPr id="100" name="Овал 13"/>
+            <a:endParaRPr b="0" lang="en-US" sz="1100" spc="-1" strike="noStrike">
+              <a:latin typeface="Arial"/>
+            </a:endParaRPr>
+          </a:p>
+        </p:txBody>
+      </p:sp>
+      <p:sp>
+        <p:nvSpPr>
+          <p:cNvPr id="99" name="Овал 13"/>
           <p:cNvSpPr/>
           <p:nvPr/>
         </p:nvSpPr>
         <p:spPr>
           <a:xfrm>
             <a:off x="3724560" y="2571840"/>
-            <a:ext cx="402840" cy="402840"/>
+            <a:ext cx="402480" cy="402480"/>
           </a:xfrm>
           <a:prstGeom prst="ellipse">
             <a:avLst/>
@@ -8236,22 +8184,22 @@
               </a:rPr>
               <a:t>02</a:t>
             </a:r>
-            <a:endParaRPr b="0" lang="ru-RU" sz="800" spc="-1" strike="noStrike">
-              <a:latin typeface="Arial"/>
-            </a:endParaRPr>
-          </a:p>
-        </p:txBody>
-      </p:sp>
-      <p:sp>
-        <p:nvSpPr>
-          <p:cNvPr id="101" name="TextBox 10"/>
+            <a:endParaRPr b="0" lang="en-US" sz="800" spc="-1" strike="noStrike">
+              <a:latin typeface="Arial"/>
+            </a:endParaRPr>
+          </a:p>
+        </p:txBody>
+      </p:sp>
+      <p:sp>
+        <p:nvSpPr>
+          <p:cNvPr id="100" name="TextBox 10"/>
           <p:cNvSpPr/>
           <p:nvPr/>
         </p:nvSpPr>
         <p:spPr>
           <a:xfrm>
             <a:off x="4192560" y="1311840"/>
-            <a:ext cx="4672080" cy="328680"/>
+            <a:ext cx="4671720" cy="328320"/>
           </a:xfrm>
           <a:prstGeom prst="rect">
             <a:avLst/>
@@ -8298,22 +8246,22 @@
               </a:rPr>
               <a:t>1</a:t>
             </a:r>
-            <a:endParaRPr b="0" lang="ru-RU" sz="1400" spc="-1" strike="noStrike">
-              <a:latin typeface="Arial"/>
-            </a:endParaRPr>
-          </a:p>
-        </p:txBody>
-      </p:sp>
-      <p:sp>
-        <p:nvSpPr>
-          <p:cNvPr id="102" name="TextBox 10"/>
+            <a:endParaRPr b="0" lang="en-US" sz="1400" spc="-1" strike="noStrike">
+              <a:latin typeface="Arial"/>
+            </a:endParaRPr>
+          </a:p>
+        </p:txBody>
+      </p:sp>
+      <p:sp>
+        <p:nvSpPr>
+          <p:cNvPr id="101" name="TextBox 10"/>
           <p:cNvSpPr/>
           <p:nvPr/>
         </p:nvSpPr>
         <p:spPr>
           <a:xfrm>
             <a:off x="4192560" y="1670760"/>
-            <a:ext cx="4672080" cy="713520"/>
+            <a:ext cx="4671720" cy="713160"/>
           </a:xfrm>
           <a:prstGeom prst="rect">
             <a:avLst/>
@@ -8360,22 +8308,22 @@
               </a:rPr>
               <a:t>1</a:t>
             </a:r>
-            <a:endParaRPr b="0" lang="ru-RU" sz="1100" spc="-1" strike="noStrike">
-              <a:latin typeface="Arial"/>
-            </a:endParaRPr>
-          </a:p>
-        </p:txBody>
-      </p:sp>
-      <p:sp>
-        <p:nvSpPr>
-          <p:cNvPr id="103" name="Овал 16"/>
+            <a:endParaRPr b="0" lang="en-US" sz="1100" spc="-1" strike="noStrike">
+              <a:latin typeface="Arial"/>
+            </a:endParaRPr>
+          </a:p>
+        </p:txBody>
+      </p:sp>
+      <p:sp>
+        <p:nvSpPr>
+          <p:cNvPr id="102" name="Овал 16"/>
           <p:cNvSpPr/>
           <p:nvPr/>
         </p:nvSpPr>
         <p:spPr>
           <a:xfrm>
             <a:off x="3724560" y="1311840"/>
-            <a:ext cx="402840" cy="402840"/>
+            <a:ext cx="402480" cy="402480"/>
           </a:xfrm>
           <a:prstGeom prst="ellipse">
             <a:avLst/>
@@ -8422,22 +8370,22 @@
               </a:rPr>
               <a:t>01</a:t>
             </a:r>
-            <a:endParaRPr b="0" lang="ru-RU" sz="800" spc="-1" strike="noStrike">
-              <a:latin typeface="Arial"/>
-            </a:endParaRPr>
-          </a:p>
-        </p:txBody>
-      </p:sp>
-      <p:sp>
-        <p:nvSpPr>
-          <p:cNvPr id="104" name="TextBox 17"/>
+            <a:endParaRPr b="0" lang="en-US" sz="800" spc="-1" strike="noStrike">
+              <a:latin typeface="Arial"/>
+            </a:endParaRPr>
+          </a:p>
+        </p:txBody>
+      </p:sp>
+      <p:sp>
+        <p:nvSpPr>
+          <p:cNvPr id="103" name="TextBox 17"/>
           <p:cNvSpPr/>
           <p:nvPr/>
         </p:nvSpPr>
         <p:spPr>
           <a:xfrm>
             <a:off x="3607560" y="215280"/>
-            <a:ext cx="5374800" cy="909360"/>
+            <a:ext cx="5374440" cy="909000"/>
           </a:xfrm>
           <a:prstGeom prst="rect">
             <a:avLst/>
@@ -8474,7 +8422,7 @@
               </a:rPr>
               <a:t>TITLE</a:t>
             </a:r>
-            <a:endParaRPr b="0" lang="ru-RU" sz="2200" spc="-1" strike="noStrike">
+            <a:endParaRPr b="0" lang="en-US" sz="2200" spc="-1" strike="noStrike">
               <a:latin typeface="Arial"/>
             </a:endParaRPr>
           </a:p>
@@ -8519,14 +8467,14 @@
       </p:grpSpPr>
       <p:sp>
         <p:nvSpPr>
-          <p:cNvPr id="105" name="Прямоугольник: скругленные углы 22"/>
+          <p:cNvPr id="104" name="Прямоугольник: скругленные углы 22"/>
           <p:cNvSpPr/>
           <p:nvPr/>
         </p:nvSpPr>
         <p:spPr>
           <a:xfrm>
             <a:off x="3417120" y="1051560"/>
-            <a:ext cx="5047560" cy="841320"/>
+            <a:ext cx="5047200" cy="840960"/>
           </a:xfrm>
           <a:prstGeom prst="roundRect">
             <a:avLst>
@@ -8557,14 +8505,14 @@
       </p:sp>
       <p:sp>
         <p:nvSpPr>
-          <p:cNvPr id="106" name="Прямоугольник: скругленные углы 28"/>
+          <p:cNvPr id="105" name="Прямоугольник: скругленные углы 28"/>
           <p:cNvSpPr/>
           <p:nvPr/>
         </p:nvSpPr>
         <p:spPr>
           <a:xfrm>
             <a:off x="3417120" y="2451960"/>
-            <a:ext cx="5047560" cy="841320"/>
+            <a:ext cx="5047200" cy="840960"/>
           </a:xfrm>
           <a:prstGeom prst="roundRect">
             <a:avLst>
@@ -8595,14 +8543,14 @@
       </p:sp>
       <p:sp>
         <p:nvSpPr>
-          <p:cNvPr id="107" name="Прямоугольник: скругленные углы 32"/>
+          <p:cNvPr id="106" name="Прямоугольник: скругленные углы 32"/>
           <p:cNvSpPr/>
           <p:nvPr/>
         </p:nvSpPr>
         <p:spPr>
           <a:xfrm>
             <a:off x="3417120" y="3849840"/>
-            <a:ext cx="5047560" cy="841320"/>
+            <a:ext cx="5047200" cy="840960"/>
           </a:xfrm>
           <a:prstGeom prst="roundRect">
             <a:avLst>
@@ -8633,14 +8581,14 @@
       </p:sp>
       <p:sp>
         <p:nvSpPr>
-          <p:cNvPr id="108" name="TextBox 10"/>
+          <p:cNvPr id="107" name="TextBox 10"/>
           <p:cNvSpPr/>
           <p:nvPr/>
         </p:nvSpPr>
         <p:spPr>
           <a:xfrm>
             <a:off x="3821760" y="1115280"/>
-            <a:ext cx="4483440" cy="713520"/>
+            <a:ext cx="4483080" cy="713160"/>
           </a:xfrm>
           <a:prstGeom prst="rect">
             <a:avLst/>
@@ -8687,15 +8635,15 @@
               </a:rPr>
               <a:t>1</a:t>
             </a:r>
-            <a:endParaRPr b="0" lang="ru-RU" sz="1100" spc="-1" strike="noStrike">
-              <a:latin typeface="Arial"/>
-            </a:endParaRPr>
-          </a:p>
-        </p:txBody>
-      </p:sp>
-      <p:sp>
-        <p:nvSpPr>
-          <p:cNvPr id="109" name="Прямая соединительная линия 4"/>
+            <a:endParaRPr b="0" lang="en-US" sz="1100" spc="-1" strike="noStrike">
+              <a:latin typeface="Arial"/>
+            </a:endParaRPr>
+          </a:p>
+        </p:txBody>
+      </p:sp>
+      <p:sp>
+        <p:nvSpPr>
+          <p:cNvPr id="108" name="Прямая соединительная линия 4"/>
           <p:cNvSpPr/>
           <p:nvPr/>
         </p:nvSpPr>
@@ -8728,14 +8676,14 @@
       </p:sp>
       <p:sp>
         <p:nvSpPr>
-          <p:cNvPr id="110" name="Прямоугольник: скругленные углы 19"/>
+          <p:cNvPr id="109" name="Прямоугольник: скругленные углы 19"/>
           <p:cNvSpPr/>
           <p:nvPr/>
         </p:nvSpPr>
         <p:spPr>
           <a:xfrm>
             <a:off x="1135800" y="1033200"/>
-            <a:ext cx="2642400" cy="880560"/>
+            <a:ext cx="2642040" cy="880200"/>
           </a:xfrm>
           <a:prstGeom prst="roundRect">
             <a:avLst>
@@ -8766,14 +8714,14 @@
       </p:sp>
       <p:sp>
         <p:nvSpPr>
-          <p:cNvPr id="111" name="TextBox 10"/>
+          <p:cNvPr id="110" name="TextBox 10"/>
           <p:cNvSpPr/>
           <p:nvPr/>
         </p:nvSpPr>
         <p:spPr>
           <a:xfrm>
             <a:off x="1164600" y="1033200"/>
-            <a:ext cx="2545920" cy="880560"/>
+            <a:ext cx="2545560" cy="880200"/>
           </a:xfrm>
           <a:prstGeom prst="rect">
             <a:avLst/>
@@ -8820,22 +8768,22 @@
               </a:rPr>
               <a:t>1</a:t>
             </a:r>
-            <a:endParaRPr b="0" lang="ru-RU" sz="1400" spc="-1" strike="noStrike">
-              <a:latin typeface="Arial"/>
-            </a:endParaRPr>
-          </a:p>
-        </p:txBody>
-      </p:sp>
-      <p:sp>
-        <p:nvSpPr>
-          <p:cNvPr id="112" name="TextBox 10"/>
+            <a:endParaRPr b="0" lang="en-US" sz="1400" spc="-1" strike="noStrike">
+              <a:latin typeface="Arial"/>
+            </a:endParaRPr>
+          </a:p>
+        </p:txBody>
+      </p:sp>
+      <p:sp>
+        <p:nvSpPr>
+          <p:cNvPr id="111" name="TextBox 10"/>
           <p:cNvSpPr/>
           <p:nvPr/>
         </p:nvSpPr>
         <p:spPr>
           <a:xfrm>
             <a:off x="3821760" y="2515680"/>
-            <a:ext cx="4483440" cy="713520"/>
+            <a:ext cx="4483080" cy="713160"/>
           </a:xfrm>
           <a:prstGeom prst="rect">
             <a:avLst/>
@@ -8882,22 +8830,22 @@
               </a:rPr>
               <a:t>2</a:t>
             </a:r>
-            <a:endParaRPr b="0" lang="ru-RU" sz="1100" spc="-1" strike="noStrike">
-              <a:latin typeface="Arial"/>
-            </a:endParaRPr>
-          </a:p>
-        </p:txBody>
-      </p:sp>
-      <p:sp>
-        <p:nvSpPr>
-          <p:cNvPr id="113" name="Прямоугольник: скругленные углы 26"/>
+            <a:endParaRPr b="0" lang="en-US" sz="1100" spc="-1" strike="noStrike">
+              <a:latin typeface="Arial"/>
+            </a:endParaRPr>
+          </a:p>
+        </p:txBody>
+      </p:sp>
+      <p:sp>
+        <p:nvSpPr>
+          <p:cNvPr id="112" name="Прямоугольник: скругленные углы 26"/>
           <p:cNvSpPr/>
           <p:nvPr/>
         </p:nvSpPr>
         <p:spPr>
           <a:xfrm>
             <a:off x="1135800" y="2433600"/>
-            <a:ext cx="2642400" cy="880560"/>
+            <a:ext cx="2642040" cy="880200"/>
           </a:xfrm>
           <a:prstGeom prst="roundRect">
             <a:avLst>
@@ -8928,14 +8876,14 @@
       </p:sp>
       <p:sp>
         <p:nvSpPr>
-          <p:cNvPr id="114" name="TextBox 10"/>
+          <p:cNvPr id="113" name="TextBox 10"/>
           <p:cNvSpPr/>
           <p:nvPr/>
         </p:nvSpPr>
         <p:spPr>
           <a:xfrm>
             <a:off x="1164600" y="2433600"/>
-            <a:ext cx="2545920" cy="880560"/>
+            <a:ext cx="2545560" cy="880200"/>
           </a:xfrm>
           <a:prstGeom prst="rect">
             <a:avLst/>
@@ -8982,22 +8930,22 @@
               </a:rPr>
               <a:t>2</a:t>
             </a:r>
-            <a:endParaRPr b="0" lang="ru-RU" sz="1400" spc="-1" strike="noStrike">
-              <a:latin typeface="Arial"/>
-            </a:endParaRPr>
-          </a:p>
-        </p:txBody>
-      </p:sp>
-      <p:sp>
-        <p:nvSpPr>
-          <p:cNvPr id="115" name="TextBox 10"/>
+            <a:endParaRPr b="0" lang="en-US" sz="1400" spc="-1" strike="noStrike">
+              <a:latin typeface="Arial"/>
+            </a:endParaRPr>
+          </a:p>
+        </p:txBody>
+      </p:sp>
+      <p:sp>
+        <p:nvSpPr>
+          <p:cNvPr id="114" name="TextBox 10"/>
           <p:cNvSpPr/>
           <p:nvPr/>
         </p:nvSpPr>
         <p:spPr>
           <a:xfrm>
             <a:off x="3821760" y="3913560"/>
-            <a:ext cx="4483440" cy="713520"/>
+            <a:ext cx="4483080" cy="713160"/>
           </a:xfrm>
           <a:prstGeom prst="rect">
             <a:avLst/>
@@ -9044,22 +8992,22 @@
               </a:rPr>
               <a:t>3</a:t>
             </a:r>
-            <a:endParaRPr b="0" lang="ru-RU" sz="1100" spc="-1" strike="noStrike">
-              <a:latin typeface="Arial"/>
-            </a:endParaRPr>
-          </a:p>
-        </p:txBody>
-      </p:sp>
-      <p:sp>
-        <p:nvSpPr>
-          <p:cNvPr id="116" name="Прямоугольник: скругленные углы 30"/>
+            <a:endParaRPr b="0" lang="en-US" sz="1100" spc="-1" strike="noStrike">
+              <a:latin typeface="Arial"/>
+            </a:endParaRPr>
+          </a:p>
+        </p:txBody>
+      </p:sp>
+      <p:sp>
+        <p:nvSpPr>
+          <p:cNvPr id="115" name="Прямоугольник: скругленные углы 30"/>
           <p:cNvSpPr/>
           <p:nvPr/>
         </p:nvSpPr>
         <p:spPr>
           <a:xfrm>
             <a:off x="1135800" y="3831480"/>
-            <a:ext cx="2642400" cy="880560"/>
+            <a:ext cx="2642040" cy="880200"/>
           </a:xfrm>
           <a:prstGeom prst="roundRect">
             <a:avLst>
@@ -9090,14 +9038,14 @@
       </p:sp>
       <p:sp>
         <p:nvSpPr>
-          <p:cNvPr id="117" name="TextBox 10"/>
+          <p:cNvPr id="116" name="TextBox 10"/>
           <p:cNvSpPr/>
           <p:nvPr/>
         </p:nvSpPr>
         <p:spPr>
           <a:xfrm>
             <a:off x="1164600" y="3831480"/>
-            <a:ext cx="2545920" cy="880560"/>
+            <a:ext cx="2545560" cy="880200"/>
           </a:xfrm>
           <a:prstGeom prst="rect">
             <a:avLst/>
@@ -9144,22 +9092,22 @@
               </a:rPr>
               <a:t>3</a:t>
             </a:r>
-            <a:endParaRPr b="0" lang="ru-RU" sz="1400" spc="-1" strike="noStrike">
-              <a:latin typeface="Arial"/>
-            </a:endParaRPr>
-          </a:p>
-        </p:txBody>
-      </p:sp>
-      <p:sp>
-        <p:nvSpPr>
-          <p:cNvPr id="118" name="Овал 5"/>
+            <a:endParaRPr b="0" lang="en-US" sz="1400" spc="-1" strike="noStrike">
+              <a:latin typeface="Arial"/>
+            </a:endParaRPr>
+          </a:p>
+        </p:txBody>
+      </p:sp>
+      <p:sp>
+        <p:nvSpPr>
+          <p:cNvPr id="117" name="Овал 5"/>
           <p:cNvSpPr/>
           <p:nvPr/>
         </p:nvSpPr>
         <p:spPr>
           <a:xfrm>
             <a:off x="675360" y="1365840"/>
-            <a:ext cx="220680" cy="220680"/>
+            <a:ext cx="220320" cy="220320"/>
           </a:xfrm>
           <a:prstGeom prst="ellipse">
             <a:avLst/>
@@ -9193,14 +9141,14 @@
       </p:sp>
       <p:sp>
         <p:nvSpPr>
-          <p:cNvPr id="119" name="Овал 33"/>
+          <p:cNvPr id="118" name="Овал 33"/>
           <p:cNvSpPr/>
           <p:nvPr/>
         </p:nvSpPr>
         <p:spPr>
           <a:xfrm>
             <a:off x="675360" y="2728080"/>
-            <a:ext cx="220680" cy="220680"/>
+            <a:ext cx="220320" cy="220320"/>
           </a:xfrm>
           <a:prstGeom prst="ellipse">
             <a:avLst/>
@@ -9234,14 +9182,14 @@
       </p:sp>
       <p:sp>
         <p:nvSpPr>
-          <p:cNvPr id="120" name="Овал 34"/>
+          <p:cNvPr id="119" name="Овал 34"/>
           <p:cNvSpPr/>
           <p:nvPr/>
         </p:nvSpPr>
         <p:spPr>
           <a:xfrm>
             <a:off x="671760" y="4156200"/>
-            <a:ext cx="220680" cy="220680"/>
+            <a:ext cx="220320" cy="220320"/>
           </a:xfrm>
           <a:prstGeom prst="ellipse">
             <a:avLst/>
@@ -9275,14 +9223,14 @@
       </p:sp>
       <p:sp>
         <p:nvSpPr>
-          <p:cNvPr id="121" name="TextBox 20"/>
+          <p:cNvPr id="120" name="TextBox 20"/>
           <p:cNvSpPr/>
           <p:nvPr/>
         </p:nvSpPr>
         <p:spPr>
           <a:xfrm>
             <a:off x="381600" y="271080"/>
-            <a:ext cx="8465400" cy="480600"/>
+            <a:ext cx="8465040" cy="480240"/>
           </a:xfrm>
           <a:prstGeom prst="rect">
             <a:avLst/>
@@ -9319,7 +9267,7 @@
               </a:rPr>
               <a:t>TITLE</a:t>
             </a:r>
-            <a:endParaRPr b="0" lang="ru-RU" sz="2200" spc="-1" strike="noStrike">
+            <a:endParaRPr b="0" lang="en-US" sz="2200" spc="-1" strike="noStrike">
               <a:latin typeface="Arial"/>
             </a:endParaRPr>
           </a:p>
@@ -9364,14 +9312,14 @@
       </p:grpSpPr>
       <p:sp>
         <p:nvSpPr>
-          <p:cNvPr id="122" name="Прямоугольник со скругленными углами 3"/>
+          <p:cNvPr id="121" name="Прямоугольник со скругленными углами 3"/>
           <p:cNvSpPr/>
           <p:nvPr/>
         </p:nvSpPr>
         <p:spPr>
           <a:xfrm>
             <a:off x="0" y="3181680"/>
-            <a:ext cx="9143280" cy="1961280"/>
+            <a:ext cx="9142920" cy="1960920"/>
           </a:xfrm>
           <a:prstGeom prst="roundRect">
             <a:avLst>
@@ -9422,22 +9370,22 @@
               </a:rPr>
               <a:t>PIC</a:t>
             </a:r>
-            <a:endParaRPr b="0" lang="ru-RU" sz="1800" spc="-1" strike="noStrike">
-              <a:latin typeface="Arial"/>
-            </a:endParaRPr>
-          </a:p>
-        </p:txBody>
-      </p:sp>
-      <p:sp>
-        <p:nvSpPr>
-          <p:cNvPr id="123" name="TextBox 10"/>
+            <a:endParaRPr b="0" lang="en-US" sz="1800" spc="-1" strike="noStrike">
+              <a:latin typeface="Arial"/>
+            </a:endParaRPr>
+          </a:p>
+        </p:txBody>
+      </p:sp>
+      <p:sp>
+        <p:nvSpPr>
+          <p:cNvPr id="122" name="TextBox 10"/>
           <p:cNvSpPr/>
           <p:nvPr/>
         </p:nvSpPr>
         <p:spPr>
           <a:xfrm>
             <a:off x="384840" y="801360"/>
-            <a:ext cx="2443320" cy="713520"/>
+            <a:ext cx="2442960" cy="713160"/>
           </a:xfrm>
           <a:prstGeom prst="rect">
             <a:avLst/>
@@ -9474,22 +9422,22 @@
               </a:rPr>
               <a:t>SUBTITLE1</a:t>
             </a:r>
-            <a:endParaRPr b="0" lang="ru-RU" sz="1400" spc="-1" strike="noStrike">
-              <a:latin typeface="Arial"/>
-            </a:endParaRPr>
-          </a:p>
-        </p:txBody>
-      </p:sp>
-      <p:sp>
-        <p:nvSpPr>
-          <p:cNvPr id="124" name="TextBox 10"/>
+            <a:endParaRPr b="0" lang="en-US" sz="1400" spc="-1" strike="noStrike">
+              <a:latin typeface="Arial"/>
+            </a:endParaRPr>
+          </a:p>
+        </p:txBody>
+      </p:sp>
+      <p:sp>
+        <p:nvSpPr>
+          <p:cNvPr id="123" name="TextBox 10"/>
           <p:cNvSpPr/>
           <p:nvPr/>
         </p:nvSpPr>
         <p:spPr>
           <a:xfrm>
             <a:off x="384840" y="1585800"/>
-            <a:ext cx="2443320" cy="1564920"/>
+            <a:ext cx="2442960" cy="1564560"/>
           </a:xfrm>
           <a:prstGeom prst="rect">
             <a:avLst/>
@@ -9536,22 +9484,22 @@
               </a:rPr>
               <a:t>1</a:t>
             </a:r>
-            <a:endParaRPr b="0" lang="ru-RU" sz="1100" spc="-1" strike="noStrike">
-              <a:latin typeface="Arial"/>
-            </a:endParaRPr>
-          </a:p>
-        </p:txBody>
-      </p:sp>
-      <p:sp>
-        <p:nvSpPr>
-          <p:cNvPr id="125" name="TextBox 10"/>
+            <a:endParaRPr b="0" lang="en-US" sz="1100" spc="-1" strike="noStrike">
+              <a:latin typeface="Arial"/>
+            </a:endParaRPr>
+          </a:p>
+        </p:txBody>
+      </p:sp>
+      <p:sp>
+        <p:nvSpPr>
+          <p:cNvPr id="124" name="TextBox 10"/>
           <p:cNvSpPr/>
           <p:nvPr/>
         </p:nvSpPr>
         <p:spPr>
           <a:xfrm>
             <a:off x="3269880" y="801360"/>
-            <a:ext cx="2443320" cy="713520"/>
+            <a:ext cx="2442960" cy="713160"/>
           </a:xfrm>
           <a:prstGeom prst="rect">
             <a:avLst/>
@@ -9588,22 +9536,22 @@
               </a:rPr>
               <a:t>SUBTITLE2</a:t>
             </a:r>
-            <a:endParaRPr b="0" lang="ru-RU" sz="1400" spc="-1" strike="noStrike">
-              <a:latin typeface="Arial"/>
-            </a:endParaRPr>
-          </a:p>
-        </p:txBody>
-      </p:sp>
-      <p:sp>
-        <p:nvSpPr>
-          <p:cNvPr id="126" name="TextBox 10"/>
+            <a:endParaRPr b="0" lang="en-US" sz="1400" spc="-1" strike="noStrike">
+              <a:latin typeface="Arial"/>
+            </a:endParaRPr>
+          </a:p>
+        </p:txBody>
+      </p:sp>
+      <p:sp>
+        <p:nvSpPr>
+          <p:cNvPr id="125" name="TextBox 10"/>
           <p:cNvSpPr/>
           <p:nvPr/>
         </p:nvSpPr>
         <p:spPr>
           <a:xfrm>
             <a:off x="3269880" y="1585800"/>
-            <a:ext cx="2443320" cy="1564920"/>
+            <a:ext cx="2442960" cy="1564560"/>
           </a:xfrm>
           <a:prstGeom prst="rect">
             <a:avLst/>
@@ -9650,22 +9598,22 @@
               </a:rPr>
               <a:t>2</a:t>
             </a:r>
-            <a:endParaRPr b="0" lang="ru-RU" sz="1100" spc="-1" strike="noStrike">
-              <a:latin typeface="Arial"/>
-            </a:endParaRPr>
-          </a:p>
-        </p:txBody>
-      </p:sp>
-      <p:sp>
-        <p:nvSpPr>
-          <p:cNvPr id="127" name="TextBox 10"/>
+            <a:endParaRPr b="0" lang="en-US" sz="1100" spc="-1" strike="noStrike">
+              <a:latin typeface="Arial"/>
+            </a:endParaRPr>
+          </a:p>
+        </p:txBody>
+      </p:sp>
+      <p:sp>
+        <p:nvSpPr>
+          <p:cNvPr id="126" name="TextBox 10"/>
           <p:cNvSpPr/>
           <p:nvPr/>
         </p:nvSpPr>
         <p:spPr>
           <a:xfrm>
             <a:off x="6154560" y="801360"/>
-            <a:ext cx="2664720" cy="713520"/>
+            <a:ext cx="2664360" cy="713160"/>
           </a:xfrm>
           <a:prstGeom prst="rect">
             <a:avLst/>
@@ -9702,22 +9650,22 @@
               </a:rPr>
               <a:t>SUBTITLE3</a:t>
             </a:r>
-            <a:endParaRPr b="0" lang="ru-RU" sz="1400" spc="-1" strike="noStrike">
-              <a:latin typeface="Arial"/>
-            </a:endParaRPr>
-          </a:p>
-        </p:txBody>
-      </p:sp>
-      <p:sp>
-        <p:nvSpPr>
-          <p:cNvPr id="128" name="TextBox 10"/>
+            <a:endParaRPr b="0" lang="en-US" sz="1400" spc="-1" strike="noStrike">
+              <a:latin typeface="Arial"/>
+            </a:endParaRPr>
+          </a:p>
+        </p:txBody>
+      </p:sp>
+      <p:sp>
+        <p:nvSpPr>
+          <p:cNvPr id="127" name="TextBox 10"/>
           <p:cNvSpPr/>
           <p:nvPr/>
         </p:nvSpPr>
         <p:spPr>
           <a:xfrm>
             <a:off x="6154560" y="1585800"/>
-            <a:ext cx="2664720" cy="1564920"/>
+            <a:ext cx="2664360" cy="1564560"/>
           </a:xfrm>
           <a:prstGeom prst="rect">
             <a:avLst/>
@@ -9764,7 +9712,7 @@
               </a:rPr>
               <a:t>3</a:t>
             </a:r>
-            <a:endParaRPr b="0" lang="ru-RU" sz="1100" spc="-1" strike="noStrike">
+            <a:endParaRPr b="0" lang="en-US" sz="1100" spc="-1" strike="noStrike">
               <a:latin typeface="Arial"/>
             </a:endParaRPr>
           </a:p>
@@ -9772,7 +9720,7 @@
       </p:sp>
       <p:grpSp>
         <p:nvGrpSpPr>
-          <p:cNvPr id="129" name="Группа 8"/>
+          <p:cNvPr id="128" name="Группа 8"/>
           <p:cNvGrpSpPr/>
           <p:nvPr/>
         </p:nvGrpSpPr>
@@ -9786,7 +9734,7 @@
         </p:grpSpPr>
         <p:sp>
           <p:nvSpPr>
-            <p:cNvPr id="130" name="Прямая соединительная линия 7"/>
+            <p:cNvPr id="129" name="Прямая соединительная линия 7"/>
             <p:cNvSpPr/>
             <p:nvPr/>
           </p:nvSpPr>
@@ -9819,7 +9767,7 @@
         </p:sp>
         <p:sp>
           <p:nvSpPr>
-            <p:cNvPr id="131" name="Прямая соединительная линия 22"/>
+            <p:cNvPr id="130" name="Прямая соединительная линия 22"/>
             <p:cNvSpPr/>
             <p:nvPr/>
           </p:nvSpPr>
@@ -9853,7 +9801,7 @@
       </p:grpSp>
       <p:grpSp>
         <p:nvGrpSpPr>
-          <p:cNvPr id="132" name="Группа 23"/>
+          <p:cNvPr id="131" name="Группа 23"/>
           <p:cNvGrpSpPr/>
           <p:nvPr/>
         </p:nvGrpSpPr>
@@ -9867,7 +9815,7 @@
         </p:grpSpPr>
         <p:sp>
           <p:nvSpPr>
-            <p:cNvPr id="133" name="Прямая соединительная линия 30"/>
+            <p:cNvPr id="132" name="Прямая соединительная линия 30"/>
             <p:cNvSpPr/>
             <p:nvPr/>
           </p:nvSpPr>
@@ -9900,7 +9848,7 @@
         </p:sp>
         <p:sp>
           <p:nvSpPr>
-            <p:cNvPr id="134" name="Прямая соединительная линия 31"/>
+            <p:cNvPr id="133" name="Прямая соединительная линия 31"/>
             <p:cNvSpPr/>
             <p:nvPr/>
           </p:nvSpPr>
@@ -9934,14 +9882,14 @@
       </p:grpSp>
       <p:sp>
         <p:nvSpPr>
-          <p:cNvPr id="135" name=""/>
+          <p:cNvPr id="134" name=""/>
           <p:cNvSpPr/>
           <p:nvPr/>
         </p:nvSpPr>
         <p:spPr>
           <a:xfrm>
             <a:off x="349200" y="228600"/>
-            <a:ext cx="8229240" cy="345960"/>
+            <a:ext cx="8228880" cy="345600"/>
           </a:xfrm>
           <a:prstGeom prst="rect">
             <a:avLst/>
@@ -9970,11 +9918,15 @@
             </a:pPr>
             <a:r>
               <a:rPr b="0" lang="en-US" sz="1800" spc="-1" strike="noStrike">
-                <a:latin typeface="Arial"/>
+                <a:solidFill>
+                  <a:srgbClr val="000000"/>
+                </a:solidFill>
+                <a:latin typeface="Arial"/>
+                <a:ea typeface="DejaVu Sans"/>
               </a:rPr>
               <a:t>TITLE</a:t>
             </a:r>
-            <a:endParaRPr b="0" lang="ru-RU" sz="1800" spc="-1" strike="noStrike">
+            <a:endParaRPr b="0" lang="en-US" sz="1800" spc="-1" strike="noStrike">
               <a:latin typeface="Arial"/>
             </a:endParaRPr>
           </a:p>
@@ -10019,14 +9971,14 @@
       </p:grpSpPr>
       <p:sp>
         <p:nvSpPr>
-          <p:cNvPr id="136" name="Прямоугольник со скругленными углами 3"/>
+          <p:cNvPr id="135" name="Прямоугольник со скругленными углами 3"/>
           <p:cNvSpPr/>
           <p:nvPr/>
         </p:nvSpPr>
         <p:spPr>
           <a:xfrm>
             <a:off x="5884200" y="0"/>
-            <a:ext cx="3259080" cy="5142960"/>
+            <a:ext cx="3258720" cy="5142600"/>
           </a:xfrm>
           <a:prstGeom prst="roundRect">
             <a:avLst>
@@ -10077,22 +10029,22 @@
               </a:rPr>
               <a:t>PIC</a:t>
             </a:r>
-            <a:endParaRPr b="0" lang="ru-RU" sz="1800" spc="-1" strike="noStrike">
-              <a:latin typeface="Arial"/>
-            </a:endParaRPr>
-          </a:p>
-        </p:txBody>
-      </p:sp>
-      <p:sp>
-        <p:nvSpPr>
-          <p:cNvPr id="137" name="Прямоугольник: скругленные углы 12"/>
+            <a:endParaRPr b="0" lang="en-US" sz="1800" spc="-1" strike="noStrike">
+              <a:latin typeface="Arial"/>
+            </a:endParaRPr>
+          </a:p>
+        </p:txBody>
+      </p:sp>
+      <p:sp>
+        <p:nvSpPr>
+          <p:cNvPr id="136" name="Прямоугольник: скругленные углы 12"/>
           <p:cNvSpPr/>
           <p:nvPr/>
         </p:nvSpPr>
         <p:spPr>
           <a:xfrm>
             <a:off x="384840" y="3378240"/>
-            <a:ext cx="5236200" cy="1320840"/>
+            <a:ext cx="5235840" cy="1320480"/>
           </a:xfrm>
           <a:prstGeom prst="roundRect">
             <a:avLst>
@@ -10123,14 +10075,14 @@
       </p:sp>
       <p:sp>
         <p:nvSpPr>
-          <p:cNvPr id="138" name="Прямоугольник: скругленные углы 13"/>
+          <p:cNvPr id="137" name="Прямоугольник: скругленные углы 13"/>
           <p:cNvSpPr/>
           <p:nvPr/>
         </p:nvSpPr>
         <p:spPr>
           <a:xfrm>
             <a:off x="3091680" y="1135080"/>
-            <a:ext cx="2532960" cy="2056680"/>
+            <a:ext cx="2532600" cy="2056320"/>
           </a:xfrm>
           <a:prstGeom prst="roundRect">
             <a:avLst>
@@ -10161,14 +10113,14 @@
       </p:sp>
       <p:sp>
         <p:nvSpPr>
-          <p:cNvPr id="139" name="Прямоугольник: скругленные углы 14"/>
+          <p:cNvPr id="138" name="Прямоугольник: скругленные углы 14"/>
           <p:cNvSpPr/>
           <p:nvPr/>
         </p:nvSpPr>
         <p:spPr>
           <a:xfrm>
             <a:off x="387720" y="1120680"/>
-            <a:ext cx="2532960" cy="2056680"/>
+            <a:ext cx="2532600" cy="2056320"/>
           </a:xfrm>
           <a:prstGeom prst="roundRect">
             <a:avLst>
@@ -10199,14 +10151,14 @@
       </p:sp>
       <p:sp>
         <p:nvSpPr>
-          <p:cNvPr id="140" name="TextBox 10"/>
+          <p:cNvPr id="139" name="TextBox 10"/>
           <p:cNvSpPr/>
           <p:nvPr/>
         </p:nvSpPr>
         <p:spPr>
           <a:xfrm>
             <a:off x="476280" y="1176840"/>
-            <a:ext cx="2343240" cy="713520"/>
+            <a:ext cx="2342880" cy="713160"/>
           </a:xfrm>
           <a:prstGeom prst="rect">
             <a:avLst/>
@@ -10253,22 +10205,22 @@
               </a:rPr>
               <a:t>1</a:t>
             </a:r>
-            <a:endParaRPr b="0" lang="ru-RU" sz="1400" spc="-1" strike="noStrike">
-              <a:latin typeface="Arial"/>
-            </a:endParaRPr>
-          </a:p>
-        </p:txBody>
-      </p:sp>
-      <p:sp>
-        <p:nvSpPr>
-          <p:cNvPr id="141" name="TextBox 10"/>
+            <a:endParaRPr b="0" lang="en-US" sz="1400" spc="-1" strike="noStrike">
+              <a:latin typeface="Arial"/>
+            </a:endParaRPr>
+          </a:p>
+        </p:txBody>
+      </p:sp>
+      <p:sp>
+        <p:nvSpPr>
+          <p:cNvPr id="140" name="TextBox 10"/>
           <p:cNvSpPr/>
           <p:nvPr/>
         </p:nvSpPr>
         <p:spPr>
           <a:xfrm>
             <a:off x="476280" y="1961280"/>
-            <a:ext cx="2343240" cy="1141920"/>
+            <a:ext cx="2342880" cy="1141560"/>
           </a:xfrm>
           <a:prstGeom prst="rect">
             <a:avLst/>
@@ -10315,22 +10267,22 @@
               </a:rPr>
               <a:t>1</a:t>
             </a:r>
-            <a:endParaRPr b="0" lang="ru-RU" sz="1100" spc="-1" strike="noStrike">
-              <a:latin typeface="Arial"/>
-            </a:endParaRPr>
-          </a:p>
-        </p:txBody>
-      </p:sp>
-      <p:sp>
-        <p:nvSpPr>
-          <p:cNvPr id="142" name="TextBox 10"/>
+            <a:endParaRPr b="0" lang="en-US" sz="1100" spc="-1" strike="noStrike">
+              <a:latin typeface="Arial"/>
+            </a:endParaRPr>
+          </a:p>
+        </p:txBody>
+      </p:sp>
+      <p:sp>
+        <p:nvSpPr>
+          <p:cNvPr id="141" name="TextBox 10"/>
           <p:cNvSpPr/>
           <p:nvPr/>
         </p:nvSpPr>
         <p:spPr>
           <a:xfrm>
             <a:off x="3179880" y="1176840"/>
-            <a:ext cx="2340000" cy="713520"/>
+            <a:ext cx="2339640" cy="713160"/>
           </a:xfrm>
           <a:prstGeom prst="rect">
             <a:avLst/>
@@ -10367,22 +10319,22 @@
               </a:rPr>
               <a:t>SUBTITLE2</a:t>
             </a:r>
-            <a:endParaRPr b="0" lang="ru-RU" sz="1400" spc="-1" strike="noStrike">
-              <a:latin typeface="Arial"/>
-            </a:endParaRPr>
-          </a:p>
-        </p:txBody>
-      </p:sp>
-      <p:sp>
-        <p:nvSpPr>
-          <p:cNvPr id="143" name="TextBox 10"/>
+            <a:endParaRPr b="0" lang="en-US" sz="1400" spc="-1" strike="noStrike">
+              <a:latin typeface="Arial"/>
+            </a:endParaRPr>
+          </a:p>
+        </p:txBody>
+      </p:sp>
+      <p:sp>
+        <p:nvSpPr>
+          <p:cNvPr id="142" name="TextBox 10"/>
           <p:cNvSpPr/>
           <p:nvPr/>
         </p:nvSpPr>
         <p:spPr>
           <a:xfrm>
             <a:off x="3179880" y="1961280"/>
-            <a:ext cx="2340000" cy="1141920"/>
+            <a:ext cx="2339640" cy="1141560"/>
           </a:xfrm>
           <a:prstGeom prst="rect">
             <a:avLst/>
@@ -10429,22 +10381,22 @@
               </a:rPr>
               <a:t>2</a:t>
             </a:r>
-            <a:endParaRPr b="0" lang="ru-RU" sz="1100" spc="-1" strike="noStrike">
-              <a:latin typeface="Arial"/>
-            </a:endParaRPr>
-          </a:p>
-        </p:txBody>
-      </p:sp>
-      <p:sp>
-        <p:nvSpPr>
-          <p:cNvPr id="144" name="TextBox 10"/>
+            <a:endParaRPr b="0" lang="en-US" sz="1100" spc="-1" strike="noStrike">
+              <a:latin typeface="Arial"/>
+            </a:endParaRPr>
+          </a:p>
+        </p:txBody>
+      </p:sp>
+      <p:sp>
+        <p:nvSpPr>
+          <p:cNvPr id="143" name="TextBox 10"/>
           <p:cNvSpPr/>
           <p:nvPr/>
         </p:nvSpPr>
         <p:spPr>
           <a:xfrm>
             <a:off x="476280" y="3479760"/>
-            <a:ext cx="5236200" cy="328680"/>
+            <a:ext cx="5235840" cy="328320"/>
           </a:xfrm>
           <a:prstGeom prst="rect">
             <a:avLst/>
@@ -10481,22 +10433,22 @@
               </a:rPr>
               <a:t>SUBTITLE3</a:t>
             </a:r>
-            <a:endParaRPr b="0" lang="ru-RU" sz="1400" spc="-1" strike="noStrike">
-              <a:latin typeface="Arial"/>
-            </a:endParaRPr>
-          </a:p>
-        </p:txBody>
-      </p:sp>
-      <p:sp>
-        <p:nvSpPr>
-          <p:cNvPr id="145" name="TextBox 10"/>
+            <a:endParaRPr b="0" lang="en-US" sz="1400" spc="-1" strike="noStrike">
+              <a:latin typeface="Arial"/>
+            </a:endParaRPr>
+          </a:p>
+        </p:txBody>
+      </p:sp>
+      <p:sp>
+        <p:nvSpPr>
+          <p:cNvPr id="144" name="TextBox 10"/>
           <p:cNvSpPr/>
           <p:nvPr/>
         </p:nvSpPr>
         <p:spPr>
           <a:xfrm>
             <a:off x="476280" y="3831480"/>
-            <a:ext cx="5146560" cy="713520"/>
+            <a:ext cx="5146200" cy="713160"/>
           </a:xfrm>
           <a:prstGeom prst="rect">
             <a:avLst/>
@@ -10543,22 +10495,22 @@
               </a:rPr>
               <a:t>3</a:t>
             </a:r>
-            <a:endParaRPr b="0" lang="ru-RU" sz="1100" spc="-1" strike="noStrike">
-              <a:latin typeface="Arial"/>
-            </a:endParaRPr>
-          </a:p>
-        </p:txBody>
-      </p:sp>
-      <p:sp>
-        <p:nvSpPr>
-          <p:cNvPr id="146" name="TextBox 20"/>
+            <a:endParaRPr b="0" lang="en-US" sz="1100" spc="-1" strike="noStrike">
+              <a:latin typeface="Arial"/>
+            </a:endParaRPr>
+          </a:p>
+        </p:txBody>
+      </p:sp>
+      <p:sp>
+        <p:nvSpPr>
+          <p:cNvPr id="145" name="TextBox 20"/>
           <p:cNvSpPr/>
           <p:nvPr/>
         </p:nvSpPr>
         <p:spPr>
           <a:xfrm>
             <a:off x="338760" y="160560"/>
-            <a:ext cx="5282280" cy="927360"/>
+            <a:ext cx="5281920" cy="927000"/>
           </a:xfrm>
           <a:prstGeom prst="rect">
             <a:avLst/>
@@ -10595,7 +10547,7 @@
               </a:rPr>
               <a:t>TITLE</a:t>
             </a:r>
-            <a:endParaRPr b="0" lang="ru-RU" sz="2200" spc="-1" strike="noStrike">
+            <a:endParaRPr b="0" lang="en-US" sz="2200" spc="-1" strike="noStrike">
               <a:latin typeface="Arial"/>
             </a:endParaRPr>
           </a:p>
